--- a/PIE.pptx
+++ b/PIE.pptx
@@ -5,37 +5,35 @@
     <p:sldMasterId id="2147483689" r:id="rId1"/>
   </p:sldMasterIdLst>
   <p:notesMasterIdLst>
-    <p:notesMasterId r:id="rId30"/>
+    <p:notesMasterId r:id="rId28"/>
   </p:notesMasterIdLst>
   <p:sldIdLst>
     <p:sldId id="256" r:id="rId2"/>
     <p:sldId id="257" r:id="rId3"/>
     <p:sldId id="258" r:id="rId4"/>
-    <p:sldId id="259" r:id="rId5"/>
-    <p:sldId id="261" r:id="rId6"/>
-    <p:sldId id="262" r:id="rId7"/>
-    <p:sldId id="264" r:id="rId8"/>
-    <p:sldId id="265" r:id="rId9"/>
-    <p:sldId id="267" r:id="rId10"/>
+    <p:sldId id="261" r:id="rId5"/>
+    <p:sldId id="264" r:id="rId6"/>
+    <p:sldId id="294" r:id="rId7"/>
+    <p:sldId id="265" r:id="rId8"/>
+    <p:sldId id="259" r:id="rId9"/>
+    <p:sldId id="282" r:id="rId10"/>
     <p:sldId id="269" r:id="rId11"/>
     <p:sldId id="276" r:id="rId12"/>
     <p:sldId id="277" r:id="rId13"/>
-    <p:sldId id="279" r:id="rId14"/>
-    <p:sldId id="278" r:id="rId15"/>
-    <p:sldId id="280" r:id="rId16"/>
-    <p:sldId id="281" r:id="rId17"/>
-    <p:sldId id="282" r:id="rId18"/>
-    <p:sldId id="271" r:id="rId19"/>
-    <p:sldId id="284" r:id="rId20"/>
-    <p:sldId id="285" r:id="rId21"/>
-    <p:sldId id="286" r:id="rId22"/>
-    <p:sldId id="287" r:id="rId23"/>
-    <p:sldId id="288" r:id="rId24"/>
-    <p:sldId id="289" r:id="rId25"/>
-    <p:sldId id="273" r:id="rId26"/>
-    <p:sldId id="290" r:id="rId27"/>
-    <p:sldId id="291" r:id="rId28"/>
-    <p:sldId id="275" r:id="rId29"/>
+    <p:sldId id="278" r:id="rId14"/>
+    <p:sldId id="281" r:id="rId15"/>
+    <p:sldId id="271" r:id="rId16"/>
+    <p:sldId id="284" r:id="rId17"/>
+    <p:sldId id="285" r:id="rId18"/>
+    <p:sldId id="286" r:id="rId19"/>
+    <p:sldId id="287" r:id="rId20"/>
+    <p:sldId id="288" r:id="rId21"/>
+    <p:sldId id="289" r:id="rId22"/>
+    <p:sldId id="290" r:id="rId23"/>
+    <p:sldId id="291" r:id="rId24"/>
+    <p:sldId id="293" r:id="rId25"/>
+    <p:sldId id="292" r:id="rId26"/>
+    <p:sldId id="275" r:id="rId27"/>
   </p:sldIdLst>
   <p:sldSz cx="12192000" cy="6858000"/>
   <p:notesSz cx="6858000" cy="9144000"/>
@@ -235,7 +233,7 @@
           <a:p>
             <a:fld id="{B4853F50-FE9A-468B-A0DD-EFB7DABE2771}" type="datetimeFigureOut">
               <a:rPr lang="en-US" smtClean="0"/>
-              <a:t>5/10/2025</a:t>
+              <a:t>5/13/2025</a:t>
             </a:fld>
             <a:endParaRPr lang="en-US"/>
           </a:p>
@@ -573,7 +571,7 @@
           <a:p>
             <a:fld id="{86953540-5053-4E20-A69F-C3EC18AE2D4C}" type="slidenum">
               <a:rPr lang="en-US" smtClean="0"/>
-              <a:t>7</a:t>
+              <a:t>5</a:t>
             </a:fld>
             <a:endParaRPr lang="en-US"/>
           </a:p>
@@ -818,7 +816,7 @@
           <a:p>
             <a:fld id="{1B8ABB09-4A1D-463E-8065-109CC2B7EFAA}" type="datetimeFigureOut">
               <a:rPr lang="ar-SA" smtClean="0"/>
-              <a:t>13/11/1446</a:t>
+              <a:t>16/11/1446</a:t>
             </a:fld>
             <a:endParaRPr lang="ar-SA"/>
           </a:p>
@@ -1026,7 +1024,7 @@
           <a:p>
             <a:fld id="{1B8ABB09-4A1D-463E-8065-109CC2B7EFAA}" type="datetimeFigureOut">
               <a:rPr lang="ar-SA" smtClean="0"/>
-              <a:t>13/11/1446</a:t>
+              <a:t>16/11/1446</a:t>
             </a:fld>
             <a:endParaRPr lang="ar-SA"/>
           </a:p>
@@ -1282,7 +1280,7 @@
           <a:p>
             <a:fld id="{1B8ABB09-4A1D-463E-8065-109CC2B7EFAA}" type="datetimeFigureOut">
               <a:rPr lang="ar-SA" smtClean="0"/>
-              <a:t>13/11/1446</a:t>
+              <a:t>16/11/1446</a:t>
             </a:fld>
             <a:endParaRPr lang="ar-SA"/>
           </a:p>
@@ -1456,7 +1454,7 @@
           <a:p>
             <a:fld id="{1B8ABB09-4A1D-463E-8065-109CC2B7EFAA}" type="datetimeFigureOut">
               <a:rPr lang="ar-SA" smtClean="0"/>
-              <a:t>13/11/1446</a:t>
+              <a:t>16/11/1446</a:t>
             </a:fld>
             <a:endParaRPr lang="ar-SA"/>
           </a:p>
@@ -1799,7 +1797,7 @@
           <a:p>
             <a:fld id="{1B8ABB09-4A1D-463E-8065-109CC2B7EFAA}" type="datetimeFigureOut">
               <a:rPr lang="ar-SA" smtClean="0"/>
-              <a:t>13/11/1446</a:t>
+              <a:t>16/11/1446</a:t>
             </a:fld>
             <a:endParaRPr lang="ar-SA"/>
           </a:p>
@@ -2074,7 +2072,7 @@
           <a:p>
             <a:fld id="{1B8ABB09-4A1D-463E-8065-109CC2B7EFAA}" type="datetimeFigureOut">
               <a:rPr lang="ar-SA" smtClean="0"/>
-              <a:t>13/11/1446</a:t>
+              <a:t>16/11/1446</a:t>
             </a:fld>
             <a:endParaRPr lang="ar-SA"/>
           </a:p>
@@ -2453,7 +2451,7 @@
           <a:p>
             <a:fld id="{1B8ABB09-4A1D-463E-8065-109CC2B7EFAA}" type="datetimeFigureOut">
               <a:rPr lang="ar-SA" smtClean="0"/>
-              <a:t>13/11/1446</a:t>
+              <a:t>16/11/1446</a:t>
             </a:fld>
             <a:endParaRPr lang="ar-SA"/>
           </a:p>
@@ -2571,7 +2569,7 @@
           <a:p>
             <a:fld id="{1B8ABB09-4A1D-463E-8065-109CC2B7EFAA}" type="datetimeFigureOut">
               <a:rPr lang="ar-SA" smtClean="0"/>
-              <a:t>13/11/1446</a:t>
+              <a:t>16/11/1446</a:t>
             </a:fld>
             <a:endParaRPr lang="ar-SA"/>
           </a:p>
@@ -2742,7 +2740,7 @@
           <a:p>
             <a:fld id="{1B8ABB09-4A1D-463E-8065-109CC2B7EFAA}" type="datetimeFigureOut">
               <a:rPr lang="ar-SA" smtClean="0"/>
-              <a:t>13/11/1446</a:t>
+              <a:t>16/11/1446</a:t>
             </a:fld>
             <a:endParaRPr lang="ar-SA"/>
           </a:p>
@@ -3096,7 +3094,7 @@
           <a:p>
             <a:fld id="{1B8ABB09-4A1D-463E-8065-109CC2B7EFAA}" type="datetimeFigureOut">
               <a:rPr lang="ar-SA" smtClean="0"/>
-              <a:t>13/11/1446</a:t>
+              <a:t>16/11/1446</a:t>
             </a:fld>
             <a:endParaRPr lang="ar-SA"/>
           </a:p>
@@ -3478,7 +3476,7 @@
           <a:p>
             <a:fld id="{1B8ABB09-4A1D-463E-8065-109CC2B7EFAA}" type="datetimeFigureOut">
               <a:rPr lang="ar-SA" smtClean="0"/>
-              <a:t>13/11/1446</a:t>
+              <a:t>16/11/1446</a:t>
             </a:fld>
             <a:endParaRPr lang="ar-SA"/>
           </a:p>
@@ -3765,7 +3763,7 @@
           <a:p>
             <a:fld id="{1B8ABB09-4A1D-463E-8065-109CC2B7EFAA}" type="datetimeFigureOut">
               <a:rPr lang="ar-SA" smtClean="0"/>
-              <a:t>13/11/1446</a:t>
+              <a:t>16/11/1446</a:t>
             </a:fld>
             <a:endParaRPr lang="ar-SA"/>
           </a:p>
@@ -4704,15 +4702,7 @@
             </a:pPr>
             <a:r>
               <a:rPr lang="en-US" sz="2400" b="1" i="1" dirty="0"/>
-              <a:t>Arshad </a:t>
-            </a:r>
-            <a:r>
-              <a:rPr lang="en-US" sz="2400" b="1" i="1" dirty="0" err="1"/>
-              <a:t>Luqman</a:t>
-            </a:r>
-            <a:r>
-              <a:rPr lang="en-US" sz="2400" b="1" i="1" dirty="0"/>
-              <a:t> </a:t>
+              <a:t>Arshad Luqman </a:t>
             </a:r>
           </a:p>
           <a:p>
@@ -5624,7 +5614,7 @@
                 </a:solidFill>
                 <a:latin typeface="-apple-system"/>
               </a:rPr>
-              <a:t>1.</a:t>
+              <a:t>3.</a:t>
             </a:r>
             <a:r>
               <a:rPr lang="en-US" sz="2800" dirty="0"/>
@@ -5824,7 +5814,7 @@
                 </a:solidFill>
                 <a:latin typeface="-apple-system"/>
               </a:rPr>
-              <a:t>1.</a:t>
+              <a:t>4.</a:t>
             </a:r>
             <a:r>
               <a:rPr lang="en-US" sz="2800" dirty="0"/>
@@ -5832,7 +5822,7 @@
             </a:r>
             <a:r>
               <a:rPr lang="en-US" sz="2800" dirty="0" err="1"/>
-              <a:t>NetworkLink</a:t>
+              <a:t>StatisticsCollector</a:t>
             </a:r>
             <a:r>
               <a:rPr lang="en-US" sz="2800" dirty="0">
@@ -5845,20 +5835,24 @@
             </a:r>
           </a:p>
           <a:p>
-            <a:pPr marL="0" lvl="0" indent="0">
+            <a:pPr marL="0" indent="0">
               <a:buClr>
                 <a:srgbClr val="E48312"/>
               </a:buClr>
               <a:buNone/>
             </a:pPr>
             <a:r>
+              <a:rPr lang="en-US" dirty="0"/>
+              <a:t>Collects and plots simulation statistics over time</a:t>
+            </a:r>
+            <a:r>
               <a:rPr lang="en-US" sz="2400" dirty="0">
                 <a:solidFill>
                   <a:srgbClr val="354154"/>
                 </a:solidFill>
                 <a:latin typeface="-apple-system"/>
               </a:rPr>
-              <a:t>Represents a network link with transmission capabilities.:</a:t>
+              <a:t>:</a:t>
             </a:r>
           </a:p>
           <a:p>
@@ -5895,15 +5889,21 @@
           <p:nvPr/>
         </p:nvPicPr>
         <p:blipFill>
-          <a:blip r:embed="rId2"/>
+          <a:blip r:embed="rId2">
+            <a:extLst>
+              <a:ext uri="{28A0092B-C50C-407E-A947-70E740481C1C}">
+                <a14:useLocalDpi xmlns:a14="http://schemas.microsoft.com/office/drawing/2010/main" val="0"/>
+              </a:ext>
+            </a:extLst>
+          </a:blip>
           <a:stretch>
             <a:fillRect/>
           </a:stretch>
         </p:blipFill>
         <p:spPr>
           <a:xfrm>
-            <a:off x="839416" y="2322165"/>
-            <a:ext cx="10296525" cy="3267075"/>
+            <a:off x="849423" y="2492896"/>
+            <a:ext cx="10296525" cy="2961456"/>
           </a:xfrm>
           <a:prstGeom prst="rect">
             <a:avLst/>
@@ -5913,7 +5913,7 @@
     </p:spTree>
     <p:extLst>
       <p:ext uri="{BB962C8B-B14F-4D97-AF65-F5344CB8AC3E}">
-        <p14:creationId xmlns:p14="http://schemas.microsoft.com/office/powerpoint/2010/main" val="681540741"/>
+        <p14:creationId xmlns:p14="http://schemas.microsoft.com/office/powerpoint/2010/main" val="1954222145"/>
       </p:ext>
     </p:extLst>
   </p:cSld>
@@ -6024,15 +6024,11 @@
                 </a:solidFill>
                 <a:latin typeface="-apple-system"/>
               </a:rPr>
-              <a:t>1.</a:t>
+              <a:t>5.</a:t>
             </a:r>
             <a:r>
               <a:rPr lang="en-US" sz="2800" dirty="0"/>
-              <a:t> </a:t>
-            </a:r>
-            <a:r>
-              <a:rPr lang="en-US" sz="2800" dirty="0" err="1"/>
-              <a:t>StatisticsCollector</a:t>
+              <a:t> Simulation</a:t>
             </a:r>
             <a:r>
               <a:rPr lang="en-US" sz="2800" dirty="0">
@@ -6053,22 +6049,8 @@
             </a:pPr>
             <a:r>
               <a:rPr lang="en-US" dirty="0"/>
-              <a:t>Collects and plots simulation statistics over time</a:t>
-            </a:r>
-            <a:r>
-              <a:rPr lang="en-US" sz="2400" dirty="0">
-                <a:solidFill>
-                  <a:srgbClr val="354154"/>
-                </a:solidFill>
-                <a:latin typeface="-apple-system"/>
-              </a:rPr>
-              <a:t>:</a:t>
-            </a:r>
-          </a:p>
-          <a:p>
-            <a:pPr marL="0" indent="0" algn="l">
-              <a:buNone/>
-            </a:pPr>
+              <a:t>Main simulation class that coordinates the entire process</a:t>
+            </a:r>
             <a:endParaRPr lang="en-US" sz="2800" dirty="0">
               <a:solidFill>
                 <a:srgbClr val="354154"/>
@@ -6112,8 +6094,8 @@
         </p:blipFill>
         <p:spPr>
           <a:xfrm>
-            <a:off x="849423" y="2492896"/>
-            <a:ext cx="10296525" cy="2961456"/>
+            <a:off x="13387" y="2268353"/>
+            <a:ext cx="11590362" cy="4581128"/>
           </a:xfrm>
           <a:prstGeom prst="rect">
             <a:avLst/>
@@ -6123,7 +6105,7 @@
     </p:spTree>
     <p:extLst>
       <p:ext uri="{BB962C8B-B14F-4D97-AF65-F5344CB8AC3E}">
-        <p14:creationId xmlns:p14="http://schemas.microsoft.com/office/powerpoint/2010/main" val="1954222145"/>
+        <p14:creationId xmlns:p14="http://schemas.microsoft.com/office/powerpoint/2010/main" val="3243231509"/>
       </p:ext>
     </p:extLst>
   </p:cSld>
@@ -6160,146 +6142,34 @@
             <p:ph type="title"/>
           </p:nvPr>
         </p:nvSpPr>
-        <p:spPr>
-          <a:xfrm>
-            <a:off x="2063552" y="260648"/>
-            <a:ext cx="8229600" cy="1143000"/>
-          </a:xfrm>
-        </p:spPr>
-        <p:txBody>
-          <a:bodyPr>
-            <a:normAutofit fontScale="90000"/>
-          </a:bodyPr>
-          <a:lstStyle/>
-          <a:p>
-            <a:pPr algn="l" rtl="0"/>
-            <a:br>
-              <a:rPr lang="en-US" b="1" dirty="0">
-                <a:solidFill>
-                  <a:srgbClr val="354154"/>
-                </a:solidFill>
-                <a:latin typeface="-apple-system"/>
-              </a:rPr>
-            </a:br>
-            <a:r>
-              <a:rPr lang="en-US" sz="3100" b="1" dirty="0">
-                <a:solidFill>
-                  <a:srgbClr val="FF0000"/>
-                </a:solidFill>
-                <a:latin typeface="-apple-system"/>
-              </a:rPr>
-              <a:t>3.Implementation Details</a:t>
-            </a:r>
-            <a:br>
-              <a:rPr lang="en-US" b="1" dirty="0">
-                <a:solidFill>
-                  <a:srgbClr val="354154"/>
-                </a:solidFill>
-                <a:latin typeface="-apple-system"/>
-              </a:rPr>
-            </a:br>
-            <a:endParaRPr lang="en-US" dirty="0"/>
-          </a:p>
-        </p:txBody>
-      </p:sp>
-      <p:sp>
-        <p:nvSpPr>
-          <p:cNvPr id="3" name="عنصر نائب للمحتوى 2"/>
-          <p:cNvSpPr>
-            <a:spLocks noGrp="1"/>
-          </p:cNvSpPr>
-          <p:nvPr>
-            <p:ph idx="1"/>
-          </p:nvPr>
-        </p:nvSpPr>
-        <p:spPr>
-          <a:xfrm>
-            <a:off x="839416" y="1268760"/>
-            <a:ext cx="10513168" cy="4713387"/>
-          </a:xfrm>
-        </p:spPr>
+        <p:spPr/>
         <p:txBody>
           <a:bodyPr>
             <a:normAutofit/>
           </a:bodyPr>
           <a:lstStyle/>
           <a:p>
-            <a:pPr marL="0" indent="0">
-              <a:buNone/>
-            </a:pPr>
-            <a:r>
-              <a:rPr lang="en-US" sz="2800" dirty="0">
-                <a:solidFill>
-                  <a:srgbClr val="354154"/>
-                </a:solidFill>
-                <a:latin typeface="-apple-system"/>
+            <a:r>
+              <a:rPr lang="en-US" dirty="0">
+                <a:solidFill>
+                  <a:srgbClr val="FF0000"/>
+                </a:solidFill>
               </a:rPr>
-              <a:t>1.</a:t>
-            </a:r>
-            <a:r>
-              <a:rPr lang="en-US" sz="2800" dirty="0"/>
-              <a:t> </a:t>
-            </a:r>
-            <a:r>
-              <a:rPr lang="en-US" sz="2800" dirty="0" err="1"/>
-              <a:t>StatisticsCollector</a:t>
-            </a:r>
-            <a:r>
-              <a:rPr lang="en-US" sz="2800" dirty="0">
-                <a:solidFill>
-                  <a:srgbClr val="354154"/>
-                </a:solidFill>
-                <a:latin typeface="-apple-system"/>
-              </a:rPr>
-              <a:t> Class:</a:t>
-            </a:r>
-          </a:p>
-          <a:p>
-            <a:pPr marL="0" indent="0">
-              <a:buClr>
-                <a:srgbClr val="E48312"/>
-              </a:buClr>
-              <a:buNone/>
-            </a:pPr>
-            <a:r>
+              <a:t>4. Results and Analysis</a:t>
+            </a:r>
+            <a:br>
               <a:rPr lang="en-US" dirty="0"/>
-              <a:t>Collects and plots simulation statistics over time</a:t>
-            </a:r>
-            <a:r>
-              <a:rPr lang="en-US" sz="2400" dirty="0">
-                <a:solidFill>
-                  <a:srgbClr val="354154"/>
-                </a:solidFill>
-                <a:latin typeface="-apple-system"/>
-              </a:rPr>
-              <a:t>:</a:t>
-            </a:r>
-          </a:p>
-          <a:p>
-            <a:pPr marL="0" indent="0" algn="l">
-              <a:buNone/>
-            </a:pPr>
-            <a:endParaRPr lang="en-US" sz="2800" dirty="0">
-              <a:solidFill>
-                <a:srgbClr val="354154"/>
-              </a:solidFill>
-              <a:latin typeface="-apple-system"/>
-            </a:endParaRPr>
-          </a:p>
-          <a:p>
-            <a:pPr marL="0" indent="0" algn="l" rtl="0">
-              <a:buNone/>
-            </a:pPr>
-            <a:endParaRPr lang="en-US" sz="2800" dirty="0"/>
+            </a:br>
+            <a:endParaRPr lang="en-US" dirty="0"/>
           </a:p>
         </p:txBody>
       </p:sp>
       <p:pic>
         <p:nvPicPr>
-          <p:cNvPr id="5" name="Picture 4">
+          <p:cNvPr id="7" name="Picture 6">
             <a:extLst>
               <a:ext uri="{FF2B5EF4-FFF2-40B4-BE49-F238E27FC236}">
-                <a16:creationId xmlns:a16="http://schemas.microsoft.com/office/drawing/2014/main" id="{88AD420B-E6A7-4C02-8969-7E0701AA93BC}"/>
+                <a16:creationId xmlns:a16="http://schemas.microsoft.com/office/drawing/2014/main" id="{99086AD4-87C9-46C8-B591-A55FBB126EE5}"/>
               </a:ext>
             </a:extLst>
           </p:cNvPr>
@@ -6322,8 +6192,8 @@
         </p:blipFill>
         <p:spPr>
           <a:xfrm>
-            <a:off x="849423" y="2492896"/>
-            <a:ext cx="10296525" cy="2961456"/>
+            <a:off x="1554471" y="1046658"/>
+            <a:ext cx="9144018" cy="6089916"/>
           </a:xfrm>
           <a:prstGeom prst="rect">
             <a:avLst/>
@@ -6333,7 +6203,7 @@
     </p:spTree>
     <p:extLst>
       <p:ext uri="{BB962C8B-B14F-4D97-AF65-F5344CB8AC3E}">
-        <p14:creationId xmlns:p14="http://schemas.microsoft.com/office/powerpoint/2010/main" val="971849523"/>
+        <p14:creationId xmlns:p14="http://schemas.microsoft.com/office/powerpoint/2010/main" val="3524107804"/>
       </p:ext>
     </p:extLst>
   </p:cSld>
@@ -6370,128 +6240,34 @@
             <p:ph type="title"/>
           </p:nvPr>
         </p:nvSpPr>
-        <p:spPr>
-          <a:xfrm>
-            <a:off x="2063552" y="260648"/>
-            <a:ext cx="8229600" cy="1143000"/>
-          </a:xfrm>
-        </p:spPr>
-        <p:txBody>
-          <a:bodyPr>
-            <a:normAutofit fontScale="90000"/>
-          </a:bodyPr>
-          <a:lstStyle/>
-          <a:p>
-            <a:pPr algn="l" rtl="0"/>
-            <a:br>
-              <a:rPr lang="en-US" b="1" dirty="0">
-                <a:solidFill>
-                  <a:srgbClr val="354154"/>
-                </a:solidFill>
-                <a:latin typeface="-apple-system"/>
-              </a:rPr>
-            </a:br>
-            <a:r>
-              <a:rPr lang="en-US" sz="3100" b="1" dirty="0">
-                <a:solidFill>
-                  <a:srgbClr val="FF0000"/>
-                </a:solidFill>
-                <a:latin typeface="-apple-system"/>
-              </a:rPr>
-              <a:t>3.Implementation Details</a:t>
-            </a:r>
-            <a:br>
-              <a:rPr lang="en-US" b="1" dirty="0">
-                <a:solidFill>
-                  <a:srgbClr val="354154"/>
-                </a:solidFill>
-                <a:latin typeface="-apple-system"/>
-              </a:rPr>
-            </a:br>
-            <a:endParaRPr lang="en-US" dirty="0"/>
-          </a:p>
-        </p:txBody>
-      </p:sp>
-      <p:sp>
-        <p:nvSpPr>
-          <p:cNvPr id="3" name="عنصر نائب للمحتوى 2"/>
-          <p:cNvSpPr>
-            <a:spLocks noGrp="1"/>
-          </p:cNvSpPr>
-          <p:nvPr>
-            <p:ph idx="1"/>
-          </p:nvPr>
-        </p:nvSpPr>
-        <p:spPr>
-          <a:xfrm>
-            <a:off x="839416" y="1268760"/>
-            <a:ext cx="10513168" cy="4713387"/>
-          </a:xfrm>
-        </p:spPr>
+        <p:spPr/>
         <p:txBody>
           <a:bodyPr>
             <a:normAutofit/>
           </a:bodyPr>
           <a:lstStyle/>
           <a:p>
-            <a:pPr marL="0" indent="0">
-              <a:buNone/>
-            </a:pPr>
-            <a:r>
-              <a:rPr lang="en-US" sz="2800" dirty="0">
-                <a:solidFill>
-                  <a:srgbClr val="354154"/>
-                </a:solidFill>
-                <a:latin typeface="-apple-system"/>
+            <a:r>
+              <a:rPr lang="en-US" dirty="0">
+                <a:solidFill>
+                  <a:srgbClr val="FF0000"/>
+                </a:solidFill>
               </a:rPr>
-              <a:t>1.</a:t>
-            </a:r>
-            <a:r>
-              <a:rPr lang="en-US" sz="2800" dirty="0"/>
-              <a:t> Simulation</a:t>
-            </a:r>
-            <a:r>
-              <a:rPr lang="en-US" sz="2800" dirty="0">
-                <a:solidFill>
-                  <a:srgbClr val="354154"/>
-                </a:solidFill>
-                <a:latin typeface="-apple-system"/>
-              </a:rPr>
-              <a:t> Class:</a:t>
-            </a:r>
-          </a:p>
-          <a:p>
-            <a:pPr marL="0" indent="0">
-              <a:buClr>
-                <a:srgbClr val="E48312"/>
-              </a:buClr>
-              <a:buNone/>
-            </a:pPr>
-            <a:r>
+              <a:t>4. Results and Analysis</a:t>
+            </a:r>
+            <a:br>
               <a:rPr lang="en-US" dirty="0"/>
-              <a:t>Main simulation class that coordinates the entire process</a:t>
-            </a:r>
-            <a:endParaRPr lang="en-US" sz="2800" dirty="0">
-              <a:solidFill>
-                <a:srgbClr val="354154"/>
-              </a:solidFill>
-              <a:latin typeface="-apple-system"/>
-            </a:endParaRPr>
-          </a:p>
-          <a:p>
-            <a:pPr marL="0" indent="0" algn="l" rtl="0">
-              <a:buNone/>
-            </a:pPr>
-            <a:endParaRPr lang="en-US" sz="2800" dirty="0"/>
+            </a:br>
+            <a:endParaRPr lang="en-US" dirty="0"/>
           </a:p>
         </p:txBody>
       </p:sp>
       <p:pic>
         <p:nvPicPr>
-          <p:cNvPr id="5" name="Picture 4">
+          <p:cNvPr id="7" name="Picture 6">
             <a:extLst>
               <a:ext uri="{FF2B5EF4-FFF2-40B4-BE49-F238E27FC236}">
-                <a16:creationId xmlns:a16="http://schemas.microsoft.com/office/drawing/2014/main" id="{88AD420B-E6A7-4C02-8969-7E0701AA93BC}"/>
+                <a16:creationId xmlns:a16="http://schemas.microsoft.com/office/drawing/2014/main" id="{99086AD4-87C9-46C8-B591-A55FBB126EE5}"/>
               </a:ext>
             </a:extLst>
           </p:cNvPr>
@@ -6514,8 +6290,118 @@
         </p:blipFill>
         <p:spPr>
           <a:xfrm>
-            <a:off x="13387" y="2268353"/>
-            <a:ext cx="11590362" cy="4581128"/>
+            <a:off x="5087888" y="1492526"/>
+            <a:ext cx="7104112" cy="4731338"/>
+          </a:xfrm>
+          <a:prstGeom prst="rect">
+            <a:avLst/>
+          </a:prstGeom>
+        </p:spPr>
+      </p:pic>
+      <p:sp>
+        <p:nvSpPr>
+          <p:cNvPr id="4" name="عنصر نائب للمحتوى 2">
+            <a:extLst>
+              <a:ext uri="{FF2B5EF4-FFF2-40B4-BE49-F238E27FC236}">
+                <a16:creationId xmlns:a16="http://schemas.microsoft.com/office/drawing/2014/main" id="{5692C18A-542F-40B8-B777-B098A3ED000A}"/>
+              </a:ext>
+            </a:extLst>
+          </p:cNvPr>
+          <p:cNvSpPr>
+            <a:spLocks noGrp="1"/>
+          </p:cNvSpPr>
+          <p:nvPr>
+            <p:ph idx="1"/>
+          </p:nvPr>
+        </p:nvSpPr>
+        <p:spPr>
+          <a:xfrm>
+            <a:off x="119336" y="2132856"/>
+            <a:ext cx="3240360" cy="1512168"/>
+          </a:xfrm>
+        </p:spPr>
+        <p:txBody>
+          <a:bodyPr>
+            <a:normAutofit/>
+          </a:bodyPr>
+          <a:lstStyle/>
+          <a:p>
+            <a:pPr marL="0" indent="0" algn="ctr">
+              <a:buNone/>
+            </a:pPr>
+            <a:r>
+              <a:rPr lang="en-US" sz="2400" b="1" dirty="0">
+                <a:solidFill>
+                  <a:srgbClr val="354154"/>
+                </a:solidFill>
+                <a:latin typeface="-apple-system"/>
+              </a:rPr>
+              <a:t>FIFO ALGORITHM</a:t>
+            </a:r>
+          </a:p>
+          <a:p>
+            <a:pPr marL="457200" indent="-457200">
+              <a:buFont typeface="+mj-lt"/>
+              <a:buAutoNum type="arabicPeriod"/>
+            </a:pPr>
+            <a:r>
+              <a:rPr lang="en-US" dirty="0">
+                <a:solidFill>
+                  <a:srgbClr val="354154"/>
+                </a:solidFill>
+                <a:latin typeface="-apple-system"/>
+              </a:rPr>
+              <a:t>WEBSITE (HTTP) dataset</a:t>
+            </a:r>
+          </a:p>
+          <a:p>
+            <a:pPr marL="457200" indent="-457200">
+              <a:buFont typeface="+mj-lt"/>
+              <a:buAutoNum type="arabicPeriod"/>
+            </a:pPr>
+            <a:r>
+              <a:rPr lang="en-US" dirty="0">
+                <a:solidFill>
+                  <a:srgbClr val="354154"/>
+                </a:solidFill>
+                <a:latin typeface="-apple-system"/>
+              </a:rPr>
+              <a:t>1000 packets </a:t>
+            </a:r>
+          </a:p>
+          <a:p>
+            <a:pPr marL="514350" indent="-514350">
+              <a:buFont typeface="+mj-lt"/>
+              <a:buAutoNum type="arabicPeriod"/>
+            </a:pPr>
+            <a:endParaRPr lang="en-US" sz="2400" dirty="0"/>
+          </a:p>
+        </p:txBody>
+      </p:sp>
+      <p:pic>
+        <p:nvPicPr>
+          <p:cNvPr id="3" name="Picture 2">
+            <a:extLst>
+              <a:ext uri="{FF2B5EF4-FFF2-40B4-BE49-F238E27FC236}">
+                <a16:creationId xmlns:a16="http://schemas.microsoft.com/office/drawing/2014/main" id="{EB4A4C6C-BC2A-44F6-B520-1C70B0D47277}"/>
+              </a:ext>
+            </a:extLst>
+          </p:cNvPr>
+          <p:cNvPicPr>
+            <a:picLocks noChangeAspect="1"/>
+          </p:cNvPicPr>
+          <p:nvPr/>
+        </p:nvPicPr>
+        <p:blipFill>
+          <a:blip r:embed="rId3"/>
+          <a:stretch>
+            <a:fillRect/>
+          </a:stretch>
+        </p:blipFill>
+        <p:spPr>
+          <a:xfrm>
+            <a:off x="119336" y="4073989"/>
+            <a:ext cx="4846568" cy="2016223"/>
           </a:xfrm>
           <a:prstGeom prst="rect">
             <a:avLst/>
@@ -6525,7 +6411,7 @@
     </p:spTree>
     <p:extLst>
       <p:ext uri="{BB962C8B-B14F-4D97-AF65-F5344CB8AC3E}">
-        <p14:creationId xmlns:p14="http://schemas.microsoft.com/office/powerpoint/2010/main" val="3243231509"/>
+        <p14:creationId xmlns:p14="http://schemas.microsoft.com/office/powerpoint/2010/main" val="2353151567"/>
       </p:ext>
     </p:extLst>
   </p:cSld>
@@ -6562,113 +6448,34 @@
             <p:ph type="title"/>
           </p:nvPr>
         </p:nvSpPr>
-        <p:spPr>
-          <a:xfrm>
-            <a:off x="2063552" y="260648"/>
-            <a:ext cx="8229600" cy="1143000"/>
-          </a:xfrm>
-        </p:spPr>
-        <p:txBody>
-          <a:bodyPr>
-            <a:normAutofit fontScale="90000"/>
-          </a:bodyPr>
-          <a:lstStyle/>
-          <a:p>
-            <a:pPr algn="l" rtl="0"/>
-            <a:br>
-              <a:rPr lang="en-US" b="1" dirty="0">
-                <a:solidFill>
-                  <a:srgbClr val="354154"/>
-                </a:solidFill>
-                <a:latin typeface="-apple-system"/>
-              </a:rPr>
-            </a:br>
-            <a:r>
-              <a:rPr lang="en-US" sz="3100" b="1" dirty="0">
-                <a:solidFill>
-                  <a:srgbClr val="FF0000"/>
-                </a:solidFill>
-                <a:latin typeface="-apple-system"/>
-              </a:rPr>
-              <a:t>3.Implementation Details</a:t>
-            </a:r>
-            <a:br>
-              <a:rPr lang="en-US" b="1" dirty="0">
-                <a:solidFill>
-                  <a:srgbClr val="354154"/>
-                </a:solidFill>
-                <a:latin typeface="-apple-system"/>
-              </a:rPr>
-            </a:br>
-            <a:endParaRPr lang="en-US" dirty="0"/>
-          </a:p>
-        </p:txBody>
-      </p:sp>
-      <p:sp>
-        <p:nvSpPr>
-          <p:cNvPr id="3" name="عنصر نائب للمحتوى 2"/>
-          <p:cNvSpPr>
-            <a:spLocks noGrp="1"/>
-          </p:cNvSpPr>
-          <p:nvPr>
-            <p:ph idx="1"/>
-          </p:nvPr>
-        </p:nvSpPr>
-        <p:spPr>
-          <a:xfrm>
-            <a:off x="839416" y="1268760"/>
-            <a:ext cx="10513168" cy="4713387"/>
-          </a:xfrm>
-        </p:spPr>
+        <p:spPr/>
         <p:txBody>
           <a:bodyPr>
             <a:normAutofit/>
           </a:bodyPr>
           <a:lstStyle/>
           <a:p>
-            <a:pPr marL="0" indent="0">
-              <a:buNone/>
-            </a:pPr>
-            <a:r>
-              <a:rPr lang="en-US" sz="2800" dirty="0">
-                <a:solidFill>
-                  <a:srgbClr val="354154"/>
-                </a:solidFill>
-                <a:latin typeface="-apple-system"/>
+            <a:r>
+              <a:rPr lang="en-US" dirty="0">
+                <a:solidFill>
+                  <a:srgbClr val="FF0000"/>
+                </a:solidFill>
               </a:rPr>
-              <a:t>1.</a:t>
-            </a:r>
-            <a:r>
-              <a:rPr lang="en-US" sz="2800" dirty="0"/>
-              <a:t> Main</a:t>
-            </a:r>
-            <a:r>
-              <a:rPr lang="en-US" sz="2800" dirty="0">
-                <a:solidFill>
-                  <a:srgbClr val="354154"/>
-                </a:solidFill>
-                <a:latin typeface="-apple-system"/>
-              </a:rPr>
-              <a:t> Method:</a:t>
-            </a:r>
-          </a:p>
-          <a:p>
-            <a:pPr marL="0" indent="0" algn="l" rtl="0">
-              <a:buNone/>
-            </a:pPr>
-            <a:r>
-              <a:rPr lang="en-US" sz="2800" dirty="0"/>
-              <a:t>Start point of the project</a:t>
-            </a:r>
+              <a:t>4. Results and Analysis</a:t>
+            </a:r>
+            <a:br>
+              <a:rPr lang="en-US" dirty="0"/>
+            </a:br>
+            <a:endParaRPr lang="en-US" dirty="0"/>
           </a:p>
         </p:txBody>
       </p:sp>
       <p:pic>
         <p:nvPicPr>
-          <p:cNvPr id="5" name="Picture 4">
+          <p:cNvPr id="7" name="Picture 6">
             <a:extLst>
               <a:ext uri="{FF2B5EF4-FFF2-40B4-BE49-F238E27FC236}">
-                <a16:creationId xmlns:a16="http://schemas.microsoft.com/office/drawing/2014/main" id="{88AD420B-E6A7-4C02-8969-7E0701AA93BC}"/>
+                <a16:creationId xmlns:a16="http://schemas.microsoft.com/office/drawing/2014/main" id="{99086AD4-87C9-46C8-B591-A55FBB126EE5}"/>
               </a:ext>
             </a:extLst>
           </p:cNvPr>
@@ -6691,8 +6498,118 @@
         </p:blipFill>
         <p:spPr>
           <a:xfrm>
-            <a:off x="13387" y="2424800"/>
-            <a:ext cx="11590362" cy="4268234"/>
+            <a:off x="4557485" y="1340768"/>
+            <a:ext cx="7634515" cy="5034854"/>
+          </a:xfrm>
+          <a:prstGeom prst="rect">
+            <a:avLst/>
+          </a:prstGeom>
+        </p:spPr>
+      </p:pic>
+      <p:sp>
+        <p:nvSpPr>
+          <p:cNvPr id="4" name="عنصر نائب للمحتوى 2">
+            <a:extLst>
+              <a:ext uri="{FF2B5EF4-FFF2-40B4-BE49-F238E27FC236}">
+                <a16:creationId xmlns:a16="http://schemas.microsoft.com/office/drawing/2014/main" id="{5692C18A-542F-40B8-B777-B098A3ED000A}"/>
+              </a:ext>
+            </a:extLst>
+          </p:cNvPr>
+          <p:cNvSpPr>
+            <a:spLocks noGrp="1"/>
+          </p:cNvSpPr>
+          <p:nvPr>
+            <p:ph idx="1"/>
+          </p:nvPr>
+        </p:nvSpPr>
+        <p:spPr>
+          <a:xfrm>
+            <a:off x="123663" y="1970173"/>
+            <a:ext cx="3240360" cy="1512168"/>
+          </a:xfrm>
+        </p:spPr>
+        <p:txBody>
+          <a:bodyPr>
+            <a:normAutofit/>
+          </a:bodyPr>
+          <a:lstStyle/>
+          <a:p>
+            <a:pPr marL="0" indent="0" algn="ctr">
+              <a:buNone/>
+            </a:pPr>
+            <a:r>
+              <a:rPr lang="en-US" sz="2400" b="1" dirty="0">
+                <a:solidFill>
+                  <a:srgbClr val="354154"/>
+                </a:solidFill>
+                <a:latin typeface="-apple-system"/>
+              </a:rPr>
+              <a:t>PIE ALGORITHM</a:t>
+            </a:r>
+          </a:p>
+          <a:p>
+            <a:pPr marL="457200" indent="-457200">
+              <a:buFont typeface="+mj-lt"/>
+              <a:buAutoNum type="arabicPeriod"/>
+            </a:pPr>
+            <a:r>
+              <a:rPr lang="en-US" dirty="0">
+                <a:solidFill>
+                  <a:srgbClr val="354154"/>
+                </a:solidFill>
+                <a:latin typeface="-apple-system"/>
+              </a:rPr>
+              <a:t>WEBSITE (HTTP) dataset</a:t>
+            </a:r>
+          </a:p>
+          <a:p>
+            <a:pPr marL="457200" indent="-457200">
+              <a:buFont typeface="+mj-lt"/>
+              <a:buAutoNum type="arabicPeriod"/>
+            </a:pPr>
+            <a:r>
+              <a:rPr lang="en-US" dirty="0">
+                <a:solidFill>
+                  <a:srgbClr val="354154"/>
+                </a:solidFill>
+                <a:latin typeface="-apple-system"/>
+              </a:rPr>
+              <a:t>1000 packets </a:t>
+            </a:r>
+          </a:p>
+          <a:p>
+            <a:pPr marL="514350" indent="-514350">
+              <a:buFont typeface="+mj-lt"/>
+              <a:buAutoNum type="arabicPeriod"/>
+            </a:pPr>
+            <a:endParaRPr lang="en-US" sz="2400" dirty="0"/>
+          </a:p>
+        </p:txBody>
+      </p:sp>
+      <p:pic>
+        <p:nvPicPr>
+          <p:cNvPr id="3" name="Picture 2">
+            <a:extLst>
+              <a:ext uri="{FF2B5EF4-FFF2-40B4-BE49-F238E27FC236}">
+                <a16:creationId xmlns:a16="http://schemas.microsoft.com/office/drawing/2014/main" id="{C9855B2A-13BC-4577-9769-3759835E8035}"/>
+              </a:ext>
+            </a:extLst>
+          </p:cNvPr>
+          <p:cNvPicPr>
+            <a:picLocks noChangeAspect="1"/>
+          </p:cNvPicPr>
+          <p:nvPr/>
+        </p:nvPicPr>
+        <p:blipFill>
+          <a:blip r:embed="rId3"/>
+          <a:stretch>
+            <a:fillRect/>
+          </a:stretch>
+        </p:blipFill>
+        <p:spPr>
+          <a:xfrm>
+            <a:off x="0" y="3409519"/>
+            <a:ext cx="4557485" cy="2683777"/>
           </a:xfrm>
           <a:prstGeom prst="rect">
             <a:avLst/>
@@ -6702,7 +6619,7 @@
     </p:spTree>
     <p:extLst>
       <p:ext uri="{BB962C8B-B14F-4D97-AF65-F5344CB8AC3E}">
-        <p14:creationId xmlns:p14="http://schemas.microsoft.com/office/powerpoint/2010/main" val="3071587134"/>
+        <p14:creationId xmlns:p14="http://schemas.microsoft.com/office/powerpoint/2010/main" val="4232923011"/>
       </p:ext>
     </p:extLst>
   </p:cSld>
@@ -6789,8 +6706,124 @@
         </p:blipFill>
         <p:spPr>
           <a:xfrm>
-            <a:off x="695400" y="1196752"/>
-            <a:ext cx="9144018" cy="6089916"/>
+            <a:off x="4594822" y="1340768"/>
+            <a:ext cx="7559840" cy="5034854"/>
+          </a:xfrm>
+          <a:prstGeom prst="rect">
+            <a:avLst/>
+          </a:prstGeom>
+        </p:spPr>
+      </p:pic>
+      <p:sp>
+        <p:nvSpPr>
+          <p:cNvPr id="4" name="عنصر نائب للمحتوى 2">
+            <a:extLst>
+              <a:ext uri="{FF2B5EF4-FFF2-40B4-BE49-F238E27FC236}">
+                <a16:creationId xmlns:a16="http://schemas.microsoft.com/office/drawing/2014/main" id="{5692C18A-542F-40B8-B777-B098A3ED000A}"/>
+              </a:ext>
+            </a:extLst>
+          </p:cNvPr>
+          <p:cNvSpPr>
+            <a:spLocks noGrp="1"/>
+          </p:cNvSpPr>
+          <p:nvPr>
+            <p:ph idx="1"/>
+          </p:nvPr>
+        </p:nvSpPr>
+        <p:spPr>
+          <a:xfrm>
+            <a:off x="123663" y="1970173"/>
+            <a:ext cx="3240360" cy="1512168"/>
+          </a:xfrm>
+        </p:spPr>
+        <p:txBody>
+          <a:bodyPr>
+            <a:normAutofit/>
+          </a:bodyPr>
+          <a:lstStyle/>
+          <a:p>
+            <a:pPr marL="0" indent="0" algn="ctr">
+              <a:buNone/>
+            </a:pPr>
+            <a:r>
+              <a:rPr lang="en-US" sz="2400" b="1" dirty="0">
+                <a:solidFill>
+                  <a:srgbClr val="354154"/>
+                </a:solidFill>
+                <a:latin typeface="-apple-system"/>
+              </a:rPr>
+              <a:t>FIFO ALGORITHM</a:t>
+            </a:r>
+          </a:p>
+          <a:p>
+            <a:pPr marL="457200" indent="-457200">
+              <a:buFont typeface="+mj-lt"/>
+              <a:buAutoNum type="arabicPeriod"/>
+            </a:pPr>
+            <a:r>
+              <a:rPr lang="en-US" dirty="0">
+                <a:solidFill>
+                  <a:srgbClr val="354154"/>
+                </a:solidFill>
+                <a:latin typeface="-apple-system"/>
+              </a:rPr>
+              <a:t>VIDEO dataset</a:t>
+            </a:r>
+          </a:p>
+          <a:p>
+            <a:pPr marL="457200" indent="-457200">
+              <a:buFont typeface="+mj-lt"/>
+              <a:buAutoNum type="arabicPeriod"/>
+            </a:pPr>
+            <a:r>
+              <a:rPr lang="en-US" dirty="0">
+                <a:solidFill>
+                  <a:srgbClr val="354154"/>
+                </a:solidFill>
+                <a:latin typeface="-apple-system"/>
+              </a:rPr>
+              <a:t>1000 packets </a:t>
+            </a:r>
+          </a:p>
+          <a:p>
+            <a:pPr marL="514350" indent="-514350">
+              <a:buFont typeface="+mj-lt"/>
+              <a:buAutoNum type="arabicPeriod"/>
+            </a:pPr>
+            <a:endParaRPr lang="en-US" sz="2400" dirty="0"/>
+          </a:p>
+        </p:txBody>
+      </p:sp>
+      <p:pic>
+        <p:nvPicPr>
+          <p:cNvPr id="3" name="Picture 2">
+            <a:extLst>
+              <a:ext uri="{FF2B5EF4-FFF2-40B4-BE49-F238E27FC236}">
+                <a16:creationId xmlns:a16="http://schemas.microsoft.com/office/drawing/2014/main" id="{C9855B2A-13BC-4577-9769-3759835E8035}"/>
+              </a:ext>
+            </a:extLst>
+          </p:cNvPr>
+          <p:cNvPicPr>
+            <a:picLocks noChangeAspect="1"/>
+          </p:cNvPicPr>
+          <p:nvPr/>
+        </p:nvPicPr>
+        <p:blipFill>
+          <a:blip r:embed="rId3">
+            <a:extLst>
+              <a:ext uri="{28A0092B-C50C-407E-A947-70E740481C1C}">
+                <a14:useLocalDpi xmlns:a14="http://schemas.microsoft.com/office/drawing/2010/main" val="0"/>
+              </a:ext>
+            </a:extLst>
+          </a:blip>
+          <a:stretch>
+            <a:fillRect/>
+          </a:stretch>
+        </p:blipFill>
+        <p:spPr>
+          <a:xfrm>
+            <a:off x="0" y="3573016"/>
+            <a:ext cx="4557485" cy="2257105"/>
           </a:xfrm>
           <a:prstGeom prst="rect">
             <a:avLst/>
@@ -6800,7 +6833,7 @@
     </p:spTree>
     <p:extLst>
       <p:ext uri="{BB962C8B-B14F-4D97-AF65-F5344CB8AC3E}">
-        <p14:creationId xmlns:p14="http://schemas.microsoft.com/office/powerpoint/2010/main" val="3524107804"/>
+        <p14:creationId xmlns:p14="http://schemas.microsoft.com/office/powerpoint/2010/main" val="1865520453"/>
       </p:ext>
     </p:extLst>
   </p:cSld>
@@ -6887,8 +6920,8 @@
         </p:blipFill>
         <p:spPr>
           <a:xfrm>
-            <a:off x="5087888" y="1340768"/>
-            <a:ext cx="7104112" cy="5034854"/>
+            <a:off x="4594822" y="1340768"/>
+            <a:ext cx="7559840" cy="5034854"/>
           </a:xfrm>
           <a:prstGeom prst="rect">
             <a:avLst/>
@@ -6913,7 +6946,7 @@
         </p:nvSpPr>
         <p:spPr>
           <a:xfrm>
-            <a:off x="119336" y="2132856"/>
+            <a:off x="123663" y="1970173"/>
             <a:ext cx="3240360" cy="1512168"/>
           </a:xfrm>
         </p:spPr>
@@ -6933,7 +6966,7 @@
                 </a:solidFill>
                 <a:latin typeface="-apple-system"/>
               </a:rPr>
-              <a:t>FIFO ALGORITHM</a:t>
+              <a:t>PIE ALGORITHM</a:t>
             </a:r>
           </a:p>
           <a:p>
@@ -6948,7 +6981,7 @@
                 </a:solidFill>
                 <a:latin typeface="-apple-system"/>
               </a:rPr>
-              <a:t>WEBSITE(HTTP) dataset</a:t>
+              <a:t>VIDEO dataset</a:t>
             </a:r>
           </a:p>
           <a:p>
@@ -6980,7 +7013,7 @@
           <p:cNvPr id="3" name="Picture 2">
             <a:extLst>
               <a:ext uri="{FF2B5EF4-FFF2-40B4-BE49-F238E27FC236}">
-                <a16:creationId xmlns:a16="http://schemas.microsoft.com/office/drawing/2014/main" id="{EB4A4C6C-BC2A-44F6-B520-1C70B0D47277}"/>
+                <a16:creationId xmlns:a16="http://schemas.microsoft.com/office/drawing/2014/main" id="{C9855B2A-13BC-4577-9769-3759835E8035}"/>
               </a:ext>
             </a:extLst>
           </p:cNvPr>
@@ -6990,15 +7023,21 @@
           <p:nvPr/>
         </p:nvPicPr>
         <p:blipFill>
-          <a:blip r:embed="rId3"/>
+          <a:blip r:embed="rId3">
+            <a:extLst>
+              <a:ext uri="{28A0092B-C50C-407E-A947-70E740481C1C}">
+                <a14:useLocalDpi xmlns:a14="http://schemas.microsoft.com/office/drawing/2010/main" val="0"/>
+              </a:ext>
+            </a:extLst>
+          </a:blip>
           <a:stretch>
             <a:fillRect/>
           </a:stretch>
         </p:blipFill>
         <p:spPr>
           <a:xfrm>
-            <a:off x="119336" y="4073989"/>
-            <a:ext cx="4846568" cy="2016223"/>
+            <a:off x="0" y="3704502"/>
+            <a:ext cx="4557485" cy="2093810"/>
           </a:xfrm>
           <a:prstGeom prst="rect">
             <a:avLst/>
@@ -7008,7 +7047,7 @@
     </p:spTree>
     <p:extLst>
       <p:ext uri="{BB962C8B-B14F-4D97-AF65-F5344CB8AC3E}">
-        <p14:creationId xmlns:p14="http://schemas.microsoft.com/office/powerpoint/2010/main" val="2353151567"/>
+        <p14:creationId xmlns:p14="http://schemas.microsoft.com/office/powerpoint/2010/main" val="89315461"/>
       </p:ext>
     </p:extLst>
   </p:cSld>
@@ -7081,7 +7120,7 @@
         <p:spPr>
           <a:xfrm>
             <a:off x="1981200" y="2492897"/>
-            <a:ext cx="8229600" cy="4525963"/>
+            <a:ext cx="8723312" cy="4525963"/>
           </a:xfrm>
         </p:spPr>
         <p:txBody>
@@ -7122,7 +7161,16 @@
             </a:pPr>
             <a:r>
               <a:rPr lang="en-US" sz="3200" b="1" dirty="0"/>
-              <a:t> 4. Implementation Details 5.</a:t>
+              <a:t>4. Implementation Details 5.</a:t>
+            </a:r>
+          </a:p>
+          <a:p>
+            <a:pPr marL="0" indent="0" algn="l">
+              <a:buNone/>
+            </a:pPr>
+            <a:r>
+              <a:rPr lang="en-US" sz="3200" b="1" dirty="0"/>
+              <a:t>5. Results</a:t>
             </a:r>
           </a:p>
           <a:p>
@@ -7220,8 +7268,8 @@
         </p:blipFill>
         <p:spPr>
           <a:xfrm>
-            <a:off x="4557485" y="1340768"/>
-            <a:ext cx="7634515" cy="5034854"/>
+            <a:off x="4580744" y="1754872"/>
+            <a:ext cx="7634515" cy="4571960"/>
           </a:xfrm>
           <a:prstGeom prst="rect">
             <a:avLst/>
@@ -7266,7 +7314,7 @@
                 </a:solidFill>
                 <a:latin typeface="-apple-system"/>
               </a:rPr>
-              <a:t>PIE ALGORITHM</a:t>
+              <a:t>FIFO ALGORITHM</a:t>
             </a:r>
           </a:p>
           <a:p>
@@ -7281,7 +7329,7 @@
                 </a:solidFill>
                 <a:latin typeface="-apple-system"/>
               </a:rPr>
-              <a:t>WEBSITE(HTTP) dataset</a:t>
+              <a:t>FTP dataset</a:t>
             </a:r>
           </a:p>
           <a:p>
@@ -7323,15 +7371,21 @@
           <p:nvPr/>
         </p:nvPicPr>
         <p:blipFill>
-          <a:blip r:embed="rId3"/>
+          <a:blip r:embed="rId3">
+            <a:extLst>
+              <a:ext uri="{28A0092B-C50C-407E-A947-70E740481C1C}">
+                <a14:useLocalDpi xmlns:a14="http://schemas.microsoft.com/office/drawing/2010/main" val="0"/>
+              </a:ext>
+            </a:extLst>
+          </a:blip>
           <a:stretch>
             <a:fillRect/>
           </a:stretch>
         </p:blipFill>
         <p:spPr>
           <a:xfrm>
-            <a:off x="0" y="3409519"/>
-            <a:ext cx="4557485" cy="2683777"/>
+            <a:off x="0" y="3671225"/>
+            <a:ext cx="4557485" cy="2160365"/>
           </a:xfrm>
           <a:prstGeom prst="rect">
             <a:avLst/>
@@ -7341,7 +7395,7 @@
     </p:spTree>
     <p:extLst>
       <p:ext uri="{BB962C8B-B14F-4D97-AF65-F5344CB8AC3E}">
-        <p14:creationId xmlns:p14="http://schemas.microsoft.com/office/powerpoint/2010/main" val="4232923011"/>
+        <p14:creationId xmlns:p14="http://schemas.microsoft.com/office/powerpoint/2010/main" val="1907870354"/>
       </p:ext>
     </p:extLst>
   </p:cSld>
@@ -7428,7 +7482,7 @@
         </p:blipFill>
         <p:spPr>
           <a:xfrm>
-            <a:off x="4594822" y="1340768"/>
+            <a:off x="4632160" y="1196752"/>
             <a:ext cx="7559840" cy="5034854"/>
           </a:xfrm>
           <a:prstGeom prst="rect">
@@ -7474,7 +7528,7 @@
                 </a:solidFill>
                 <a:latin typeface="-apple-system"/>
               </a:rPr>
-              <a:t>FIFO ALGORITHM</a:t>
+              <a:t>PIE ALGORITHM</a:t>
             </a:r>
           </a:p>
           <a:p>
@@ -7489,7 +7543,7 @@
                 </a:solidFill>
                 <a:latin typeface="-apple-system"/>
               </a:rPr>
-              <a:t>VIDEO dataset</a:t>
+              <a:t>FTP dataset</a:t>
             </a:r>
           </a:p>
           <a:p>
@@ -7544,8 +7598,8 @@
         </p:blipFill>
         <p:spPr>
           <a:xfrm>
-            <a:off x="0" y="3573016"/>
-            <a:ext cx="4557485" cy="2257105"/>
+            <a:off x="0" y="3564714"/>
+            <a:ext cx="4557485" cy="2373386"/>
           </a:xfrm>
           <a:prstGeom prst="rect">
             <a:avLst/>
@@ -7555,7 +7609,7 @@
     </p:spTree>
     <p:extLst>
       <p:ext uri="{BB962C8B-B14F-4D97-AF65-F5344CB8AC3E}">
-        <p14:creationId xmlns:p14="http://schemas.microsoft.com/office/powerpoint/2010/main" val="1865520453"/>
+        <p14:creationId xmlns:p14="http://schemas.microsoft.com/office/powerpoint/2010/main" val="3935559164"/>
       </p:ext>
     </p:extLst>
   </p:cSld>
@@ -7592,7 +7646,12 @@
             <p:ph type="title"/>
           </p:nvPr>
         </p:nvSpPr>
-        <p:spPr/>
+        <p:spPr>
+          <a:xfrm>
+            <a:off x="263352" y="173247"/>
+            <a:ext cx="10058400" cy="1450757"/>
+          </a:xfrm>
+        </p:spPr>
         <p:txBody>
           <a:bodyPr>
             <a:normAutofit/>
@@ -7600,36 +7659,54 @@
           <a:lstStyle/>
           <a:p>
             <a:r>
-              <a:rPr lang="en-US" dirty="0">
+              <a:rPr lang="en-US" sz="3600" b="1" dirty="0">
                 <a:solidFill>
                   <a:srgbClr val="FF0000"/>
                 </a:solidFill>
               </a:rPr>
-              <a:t>4. Results and Analysis</a:t>
+              <a:t>4. </a:t>
+            </a:r>
+            <a:r>
+              <a:rPr lang="en-US" sz="3600" dirty="0">
+                <a:solidFill>
+                  <a:srgbClr val="FF0000"/>
+                </a:solidFill>
+              </a:rPr>
+              <a:t>Results and Analysis</a:t>
+            </a:r>
+            <a:r>
+              <a:rPr lang="en-US" sz="3600" b="1" dirty="0">
+                <a:solidFill>
+                  <a:srgbClr val="FF0000"/>
+                </a:solidFill>
+              </a:rPr>
+              <a:t> </a:t>
             </a:r>
             <a:br>
-              <a:rPr lang="en-US" dirty="0"/>
+              <a:rPr lang="en-US" b="1" dirty="0"/>
             </a:br>
-            <a:endParaRPr lang="en-US" dirty="0"/>
+            <a:endParaRPr lang="en-US" b="1" dirty="0"/>
           </a:p>
         </p:txBody>
       </p:sp>
       <p:pic>
         <p:nvPicPr>
-          <p:cNvPr id="7" name="Picture 6">
+          <p:cNvPr id="6" name="Content Placeholder 5">
             <a:extLst>
               <a:ext uri="{FF2B5EF4-FFF2-40B4-BE49-F238E27FC236}">
-                <a16:creationId xmlns:a16="http://schemas.microsoft.com/office/drawing/2014/main" id="{99086AD4-87C9-46C8-B591-A55FBB126EE5}"/>
+                <a16:creationId xmlns:a16="http://schemas.microsoft.com/office/drawing/2014/main" id="{FA3EAAC7-8B12-4A95-8A24-50E4F640A77D}"/>
               </a:ext>
             </a:extLst>
           </p:cNvPr>
           <p:cNvPicPr>
-            <a:picLocks noChangeAspect="1"/>
+            <a:picLocks noGrp="1" noChangeAspect="1"/>
           </p:cNvPicPr>
-          <p:nvPr/>
+          <p:nvPr>
+            <p:ph idx="1"/>
+          </p:nvPr>
         </p:nvPicPr>
         <p:blipFill>
-          <a:blip r:embed="rId2">
+          <a:blip r:embed="rId2" cstate="print">
             <a:extLst>
               <a:ext uri="{28A0092B-C50C-407E-A947-70E740481C1C}">
                 <a14:useLocalDpi xmlns:a14="http://schemas.microsoft.com/office/drawing/2010/main" val="0"/>
@@ -7642,124 +7719,8 @@
         </p:blipFill>
         <p:spPr>
           <a:xfrm>
-            <a:off x="4594822" y="1340768"/>
-            <a:ext cx="7559840" cy="5034854"/>
-          </a:xfrm>
-          <a:prstGeom prst="rect">
-            <a:avLst/>
-          </a:prstGeom>
-        </p:spPr>
-      </p:pic>
-      <p:sp>
-        <p:nvSpPr>
-          <p:cNvPr id="4" name="عنصر نائب للمحتوى 2">
-            <a:extLst>
-              <a:ext uri="{FF2B5EF4-FFF2-40B4-BE49-F238E27FC236}">
-                <a16:creationId xmlns:a16="http://schemas.microsoft.com/office/drawing/2014/main" id="{5692C18A-542F-40B8-B777-B098A3ED000A}"/>
-              </a:ext>
-            </a:extLst>
-          </p:cNvPr>
-          <p:cNvSpPr>
-            <a:spLocks noGrp="1"/>
-          </p:cNvSpPr>
-          <p:nvPr>
-            <p:ph idx="1"/>
-          </p:nvPr>
-        </p:nvSpPr>
-        <p:spPr>
-          <a:xfrm>
-            <a:off x="123663" y="1970173"/>
-            <a:ext cx="3240360" cy="1512168"/>
-          </a:xfrm>
-        </p:spPr>
-        <p:txBody>
-          <a:bodyPr>
-            <a:normAutofit/>
-          </a:bodyPr>
-          <a:lstStyle/>
-          <a:p>
-            <a:pPr marL="0" indent="0" algn="ctr">
-              <a:buNone/>
-            </a:pPr>
-            <a:r>
-              <a:rPr lang="en-US" sz="2400" b="1" dirty="0">
-                <a:solidFill>
-                  <a:srgbClr val="354154"/>
-                </a:solidFill>
-                <a:latin typeface="-apple-system"/>
-              </a:rPr>
-              <a:t>PIE ALGORITHM</a:t>
-            </a:r>
-          </a:p>
-          <a:p>
-            <a:pPr marL="457200" indent="-457200">
-              <a:buFont typeface="+mj-lt"/>
-              <a:buAutoNum type="arabicPeriod"/>
-            </a:pPr>
-            <a:r>
-              <a:rPr lang="en-US" dirty="0">
-                <a:solidFill>
-                  <a:srgbClr val="354154"/>
-                </a:solidFill>
-                <a:latin typeface="-apple-system"/>
-              </a:rPr>
-              <a:t>VIDEO dataset</a:t>
-            </a:r>
-          </a:p>
-          <a:p>
-            <a:pPr marL="457200" indent="-457200">
-              <a:buFont typeface="+mj-lt"/>
-              <a:buAutoNum type="arabicPeriod"/>
-            </a:pPr>
-            <a:r>
-              <a:rPr lang="en-US" dirty="0">
-                <a:solidFill>
-                  <a:srgbClr val="354154"/>
-                </a:solidFill>
-                <a:latin typeface="-apple-system"/>
-              </a:rPr>
-              <a:t>1000 packets </a:t>
-            </a:r>
-          </a:p>
-          <a:p>
-            <a:pPr marL="514350" indent="-514350">
-              <a:buFont typeface="+mj-lt"/>
-              <a:buAutoNum type="arabicPeriod"/>
-            </a:pPr>
-            <a:endParaRPr lang="en-US" sz="2400" dirty="0"/>
-          </a:p>
-        </p:txBody>
-      </p:sp>
-      <p:pic>
-        <p:nvPicPr>
-          <p:cNvPr id="3" name="Picture 2">
-            <a:extLst>
-              <a:ext uri="{FF2B5EF4-FFF2-40B4-BE49-F238E27FC236}">
-                <a16:creationId xmlns:a16="http://schemas.microsoft.com/office/drawing/2014/main" id="{C9855B2A-13BC-4577-9769-3759835E8035}"/>
-              </a:ext>
-            </a:extLst>
-          </p:cNvPr>
-          <p:cNvPicPr>
-            <a:picLocks noChangeAspect="1"/>
-          </p:cNvPicPr>
-          <p:nvPr/>
-        </p:nvPicPr>
-        <p:blipFill>
-          <a:blip r:embed="rId3">
-            <a:extLst>
-              <a:ext uri="{28A0092B-C50C-407E-A947-70E740481C1C}">
-                <a14:useLocalDpi xmlns:a14="http://schemas.microsoft.com/office/drawing/2010/main" val="0"/>
-              </a:ext>
-            </a:extLst>
-          </a:blip>
-          <a:stretch>
-            <a:fillRect/>
-          </a:stretch>
-        </p:blipFill>
-        <p:spPr>
-          <a:xfrm>
-            <a:off x="0" y="3704502"/>
-            <a:ext cx="4557485" cy="2093810"/>
+            <a:off x="2279576" y="1196752"/>
+            <a:ext cx="6688982" cy="5169441"/>
           </a:xfrm>
           <a:prstGeom prst="rect">
             <a:avLst/>
@@ -7769,7 +7730,7 @@
     </p:spTree>
     <p:extLst>
       <p:ext uri="{BB962C8B-B14F-4D97-AF65-F5344CB8AC3E}">
-        <p14:creationId xmlns:p14="http://schemas.microsoft.com/office/powerpoint/2010/main" val="89315461"/>
+        <p14:creationId xmlns:p14="http://schemas.microsoft.com/office/powerpoint/2010/main" val="1371105871"/>
       </p:ext>
     </p:extLst>
   </p:cSld>
@@ -7806,7 +7767,12 @@
             <p:ph type="title"/>
           </p:nvPr>
         </p:nvSpPr>
-        <p:spPr/>
+        <p:spPr>
+          <a:xfrm>
+            <a:off x="263352" y="173247"/>
+            <a:ext cx="10058400" cy="1450757"/>
+          </a:xfrm>
+        </p:spPr>
         <p:txBody>
           <a:bodyPr>
             <a:normAutofit/>
@@ -7814,176 +7780,381 @@
           <a:lstStyle/>
           <a:p>
             <a:r>
-              <a:rPr lang="en-US" dirty="0">
+              <a:rPr lang="en-US" sz="3600" b="1" dirty="0">
                 <a:solidFill>
                   <a:srgbClr val="FF0000"/>
                 </a:solidFill>
+                <a:effectLst>
+                  <a:outerShdw blurRad="38100" dist="38100" dir="2700000" algn="tl">
+                    <a:srgbClr val="000000">
+                      <a:alpha val="43137"/>
+                    </a:srgbClr>
+                  </a:outerShdw>
+                </a:effectLst>
               </a:rPr>
-              <a:t>4. Results and Analysis</a:t>
+              <a:t>5. Results Discussion </a:t>
             </a:r>
             <a:br>
-              <a:rPr lang="en-US" dirty="0"/>
+              <a:rPr lang="en-US" b="1" dirty="0">
+                <a:effectLst>
+                  <a:outerShdw blurRad="38100" dist="38100" dir="2700000" algn="tl">
+                    <a:srgbClr val="000000">
+                      <a:alpha val="43137"/>
+                    </a:srgbClr>
+                  </a:outerShdw>
+                </a:effectLst>
+              </a:rPr>
             </a:br>
-            <a:endParaRPr lang="en-US" dirty="0"/>
-          </a:p>
-        </p:txBody>
-      </p:sp>
-      <p:pic>
-        <p:nvPicPr>
-          <p:cNvPr id="7" name="Picture 6">
+            <a:endParaRPr lang="en-US" b="1" dirty="0">
+              <a:effectLst>
+                <a:outerShdw blurRad="38100" dist="38100" dir="2700000" algn="tl">
+                  <a:srgbClr val="000000">
+                    <a:alpha val="43137"/>
+                  </a:srgbClr>
+                </a:outerShdw>
+              </a:effectLst>
+            </a:endParaRPr>
+          </a:p>
+        </p:txBody>
+      </p:sp>
+      <p:sp>
+        <p:nvSpPr>
+          <p:cNvPr id="7" name="عنصر نائب للمحتوى 2">
             <a:extLst>
               <a:ext uri="{FF2B5EF4-FFF2-40B4-BE49-F238E27FC236}">
-                <a16:creationId xmlns:a16="http://schemas.microsoft.com/office/drawing/2014/main" id="{99086AD4-87C9-46C8-B591-A55FBB126EE5}"/>
+                <a16:creationId xmlns:a16="http://schemas.microsoft.com/office/drawing/2014/main" id="{E3C30BD4-14CB-4AFF-92DA-6F5FF09C3492}"/>
               </a:ext>
             </a:extLst>
           </p:cNvPr>
-          <p:cNvPicPr>
-            <a:picLocks noChangeAspect="1"/>
-          </p:cNvPicPr>
+          <p:cNvSpPr txBox="1">
+            <a:spLocks/>
+          </p:cNvSpPr>
           <p:nvPr/>
-        </p:nvPicPr>
-        <p:blipFill>
-          <a:blip r:embed="rId2">
-            <a:extLst>
-              <a:ext uri="{28A0092B-C50C-407E-A947-70E740481C1C}">
-                <a14:useLocalDpi xmlns:a14="http://schemas.microsoft.com/office/drawing/2010/main" val="0"/>
-              </a:ext>
-            </a:extLst>
-          </a:blip>
-          <a:stretch>
-            <a:fillRect/>
-          </a:stretch>
-        </p:blipFill>
-        <p:spPr>
-          <a:xfrm>
-            <a:off x="4580744" y="1754872"/>
-            <a:ext cx="7634515" cy="4571960"/>
+        </p:nvSpPr>
+        <p:spPr>
+          <a:xfrm>
+            <a:off x="335360" y="1556792"/>
+            <a:ext cx="11129609" cy="5544616"/>
           </a:xfrm>
           <a:prstGeom prst="rect">
             <a:avLst/>
           </a:prstGeom>
         </p:spPr>
-      </p:pic>
-      <p:sp>
-        <p:nvSpPr>
-          <p:cNvPr id="4" name="عنصر نائب للمحتوى 2">
-            <a:extLst>
-              <a:ext uri="{FF2B5EF4-FFF2-40B4-BE49-F238E27FC236}">
-                <a16:creationId xmlns:a16="http://schemas.microsoft.com/office/drawing/2014/main" id="{5692C18A-542F-40B8-B777-B098A3ED000A}"/>
-              </a:ext>
-            </a:extLst>
-          </p:cNvPr>
-          <p:cNvSpPr>
-            <a:spLocks noGrp="1"/>
-          </p:cNvSpPr>
-          <p:nvPr>
-            <p:ph idx="1"/>
-          </p:nvPr>
-        </p:nvSpPr>
-        <p:spPr>
-          <a:xfrm>
-            <a:off x="123663" y="1970173"/>
-            <a:ext cx="3240360" cy="1512168"/>
-          </a:xfrm>
-        </p:spPr>
-        <p:txBody>
-          <a:bodyPr>
-            <a:normAutofit/>
+        <p:txBody>
+          <a:bodyPr vert="horz" lIns="0" tIns="45720" rIns="0" bIns="45720" rtlCol="0">
+            <a:noAutofit/>
           </a:bodyPr>
-          <a:lstStyle/>
-          <a:p>
-            <a:pPr marL="0" indent="0" algn="ctr">
-              <a:buNone/>
-            </a:pPr>
-            <a:r>
-              <a:rPr lang="en-US" sz="2400" b="1" dirty="0">
-                <a:solidFill>
-                  <a:srgbClr val="354154"/>
-                </a:solidFill>
-                <a:latin typeface="-apple-system"/>
-              </a:rPr>
-              <a:t>FIFO ALGORITHM</a:t>
-            </a:r>
-          </a:p>
-          <a:p>
-            <a:pPr marL="457200" indent="-457200">
-              <a:buFont typeface="+mj-lt"/>
-              <a:buAutoNum type="arabicPeriod"/>
-            </a:pPr>
-            <a:r>
-              <a:rPr lang="en-US" dirty="0">
-                <a:solidFill>
-                  <a:srgbClr val="354154"/>
-                </a:solidFill>
-                <a:latin typeface="-apple-system"/>
-              </a:rPr>
-              <a:t>FTP dataset</a:t>
-            </a:r>
-          </a:p>
-          <a:p>
-            <a:pPr marL="457200" indent="-457200">
-              <a:buFont typeface="+mj-lt"/>
-              <a:buAutoNum type="arabicPeriod"/>
-            </a:pPr>
-            <a:r>
-              <a:rPr lang="en-US" dirty="0">
-                <a:solidFill>
-                  <a:srgbClr val="354154"/>
-                </a:solidFill>
-                <a:latin typeface="-apple-system"/>
-              </a:rPr>
-              <a:t>1000 packets </a:t>
-            </a:r>
-          </a:p>
-          <a:p>
-            <a:pPr marL="514350" indent="-514350">
-              <a:buFont typeface="+mj-lt"/>
-              <a:buAutoNum type="arabicPeriod"/>
+          <a:lstStyle>
+            <a:lvl1pPr marL="91440" indent="-91440" algn="l" defTabSz="914400" rtl="0" eaLnBrk="1" latinLnBrk="0" hangingPunct="1">
+              <a:lnSpc>
+                <a:spcPct val="90000"/>
+              </a:lnSpc>
+              <a:spcBef>
+                <a:spcPts val="1200"/>
+              </a:spcBef>
+              <a:spcAft>
+                <a:spcPts val="200"/>
+              </a:spcAft>
+              <a:buClr>
+                <a:schemeClr val="accent1"/>
+              </a:buClr>
+              <a:buSzPct val="100000"/>
+              <a:buFont typeface="Calibri" panose="020F0502020204030204" pitchFamily="34" charset="0"/>
+              <a:buChar char=" "/>
+              <a:defRPr sz="2000" kern="1200">
+                <a:solidFill>
+                  <a:schemeClr val="tx1">
+                    <a:lumMod val="75000"/>
+                    <a:lumOff val="25000"/>
+                  </a:schemeClr>
+                </a:solidFill>
+                <a:latin typeface="+mn-lt"/>
+                <a:ea typeface="+mn-ea"/>
+                <a:cs typeface="+mn-cs"/>
+              </a:defRPr>
+            </a:lvl1pPr>
+            <a:lvl2pPr marL="384048" indent="-182880" algn="l" defTabSz="914400" rtl="0" eaLnBrk="1" latinLnBrk="0" hangingPunct="1">
+              <a:lnSpc>
+                <a:spcPct val="90000"/>
+              </a:lnSpc>
+              <a:spcBef>
+                <a:spcPts val="200"/>
+              </a:spcBef>
+              <a:spcAft>
+                <a:spcPts val="400"/>
+              </a:spcAft>
+              <a:buClr>
+                <a:schemeClr val="accent1"/>
+              </a:buClr>
+              <a:buFont typeface="Calibri" pitchFamily="34" charset="0"/>
+              <a:buChar char="◦"/>
+              <a:defRPr sz="1800" kern="1200">
+                <a:solidFill>
+                  <a:schemeClr val="tx1">
+                    <a:lumMod val="75000"/>
+                    <a:lumOff val="25000"/>
+                  </a:schemeClr>
+                </a:solidFill>
+                <a:latin typeface="+mn-lt"/>
+                <a:ea typeface="+mn-ea"/>
+                <a:cs typeface="+mn-cs"/>
+              </a:defRPr>
+            </a:lvl2pPr>
+            <a:lvl3pPr marL="566928" indent="-182880" algn="l" defTabSz="914400" rtl="0" eaLnBrk="1" latinLnBrk="0" hangingPunct="1">
+              <a:lnSpc>
+                <a:spcPct val="90000"/>
+              </a:lnSpc>
+              <a:spcBef>
+                <a:spcPts val="200"/>
+              </a:spcBef>
+              <a:spcAft>
+                <a:spcPts val="400"/>
+              </a:spcAft>
+              <a:buClr>
+                <a:schemeClr val="accent1"/>
+              </a:buClr>
+              <a:buFont typeface="Calibri" pitchFamily="34" charset="0"/>
+              <a:buChar char="◦"/>
+              <a:defRPr sz="1400" kern="1200">
+                <a:solidFill>
+                  <a:schemeClr val="tx1">
+                    <a:lumMod val="75000"/>
+                    <a:lumOff val="25000"/>
+                  </a:schemeClr>
+                </a:solidFill>
+                <a:latin typeface="+mn-lt"/>
+                <a:ea typeface="+mn-ea"/>
+                <a:cs typeface="+mn-cs"/>
+              </a:defRPr>
+            </a:lvl3pPr>
+            <a:lvl4pPr marL="749808" indent="-182880" algn="l" defTabSz="914400" rtl="0" eaLnBrk="1" latinLnBrk="0" hangingPunct="1">
+              <a:lnSpc>
+                <a:spcPct val="90000"/>
+              </a:lnSpc>
+              <a:spcBef>
+                <a:spcPts val="200"/>
+              </a:spcBef>
+              <a:spcAft>
+                <a:spcPts val="400"/>
+              </a:spcAft>
+              <a:buClr>
+                <a:schemeClr val="accent1"/>
+              </a:buClr>
+              <a:buFont typeface="Calibri" pitchFamily="34" charset="0"/>
+              <a:buChar char="◦"/>
+              <a:defRPr sz="1400" kern="1200">
+                <a:solidFill>
+                  <a:schemeClr val="tx1">
+                    <a:lumMod val="75000"/>
+                    <a:lumOff val="25000"/>
+                  </a:schemeClr>
+                </a:solidFill>
+                <a:latin typeface="+mn-lt"/>
+                <a:ea typeface="+mn-ea"/>
+                <a:cs typeface="+mn-cs"/>
+              </a:defRPr>
+            </a:lvl4pPr>
+            <a:lvl5pPr marL="932688" indent="-182880" algn="l" defTabSz="914400" rtl="0" eaLnBrk="1" latinLnBrk="0" hangingPunct="1">
+              <a:lnSpc>
+                <a:spcPct val="90000"/>
+              </a:lnSpc>
+              <a:spcBef>
+                <a:spcPts val="200"/>
+              </a:spcBef>
+              <a:spcAft>
+                <a:spcPts val="400"/>
+              </a:spcAft>
+              <a:buClr>
+                <a:schemeClr val="accent1"/>
+              </a:buClr>
+              <a:buFont typeface="Calibri" pitchFamily="34" charset="0"/>
+              <a:buChar char="◦"/>
+              <a:defRPr sz="1400" kern="1200">
+                <a:solidFill>
+                  <a:schemeClr val="tx1">
+                    <a:lumMod val="75000"/>
+                    <a:lumOff val="25000"/>
+                  </a:schemeClr>
+                </a:solidFill>
+                <a:latin typeface="+mn-lt"/>
+                <a:ea typeface="+mn-ea"/>
+                <a:cs typeface="+mn-cs"/>
+              </a:defRPr>
+            </a:lvl5pPr>
+            <a:lvl6pPr marL="1100000" indent="-228600" algn="l" defTabSz="914400" rtl="0" eaLnBrk="1" latinLnBrk="0" hangingPunct="1">
+              <a:lnSpc>
+                <a:spcPct val="90000"/>
+              </a:lnSpc>
+              <a:spcBef>
+                <a:spcPts val="200"/>
+              </a:spcBef>
+              <a:spcAft>
+                <a:spcPts val="400"/>
+              </a:spcAft>
+              <a:buClr>
+                <a:schemeClr val="accent1"/>
+              </a:buClr>
+              <a:buFont typeface="Calibri" pitchFamily="34" charset="0"/>
+              <a:buChar char="◦"/>
+              <a:defRPr sz="1400" kern="1200">
+                <a:solidFill>
+                  <a:schemeClr val="tx1">
+                    <a:lumMod val="75000"/>
+                    <a:lumOff val="25000"/>
+                  </a:schemeClr>
+                </a:solidFill>
+                <a:latin typeface="+mn-lt"/>
+                <a:ea typeface="+mn-ea"/>
+                <a:cs typeface="+mn-cs"/>
+              </a:defRPr>
+            </a:lvl6pPr>
+            <a:lvl7pPr marL="1300000" indent="-228600" algn="l" defTabSz="914400" rtl="0" eaLnBrk="1" latinLnBrk="0" hangingPunct="1">
+              <a:lnSpc>
+                <a:spcPct val="90000"/>
+              </a:lnSpc>
+              <a:spcBef>
+                <a:spcPts val="200"/>
+              </a:spcBef>
+              <a:spcAft>
+                <a:spcPts val="400"/>
+              </a:spcAft>
+              <a:buClr>
+                <a:schemeClr val="accent1"/>
+              </a:buClr>
+              <a:buFont typeface="Calibri" pitchFamily="34" charset="0"/>
+              <a:buChar char="◦"/>
+              <a:defRPr sz="1400" kern="1200">
+                <a:solidFill>
+                  <a:schemeClr val="tx1">
+                    <a:lumMod val="75000"/>
+                    <a:lumOff val="25000"/>
+                  </a:schemeClr>
+                </a:solidFill>
+                <a:latin typeface="+mn-lt"/>
+                <a:ea typeface="+mn-ea"/>
+                <a:cs typeface="+mn-cs"/>
+              </a:defRPr>
+            </a:lvl7pPr>
+            <a:lvl8pPr marL="1500000" indent="-228600" algn="l" defTabSz="914400" rtl="0" eaLnBrk="1" latinLnBrk="0" hangingPunct="1">
+              <a:lnSpc>
+                <a:spcPct val="90000"/>
+              </a:lnSpc>
+              <a:spcBef>
+                <a:spcPts val="200"/>
+              </a:spcBef>
+              <a:spcAft>
+                <a:spcPts val="400"/>
+              </a:spcAft>
+              <a:buClr>
+                <a:schemeClr val="accent1"/>
+              </a:buClr>
+              <a:buFont typeface="Calibri" pitchFamily="34" charset="0"/>
+              <a:buChar char="◦"/>
+              <a:defRPr sz="1400" kern="1200">
+                <a:solidFill>
+                  <a:schemeClr val="tx1">
+                    <a:lumMod val="75000"/>
+                    <a:lumOff val="25000"/>
+                  </a:schemeClr>
+                </a:solidFill>
+                <a:latin typeface="+mn-lt"/>
+                <a:ea typeface="+mn-ea"/>
+                <a:cs typeface="+mn-cs"/>
+              </a:defRPr>
+            </a:lvl8pPr>
+            <a:lvl9pPr marL="1700000" indent="-228600" algn="l" defTabSz="914400" rtl="0" eaLnBrk="1" latinLnBrk="0" hangingPunct="1">
+              <a:lnSpc>
+                <a:spcPct val="90000"/>
+              </a:lnSpc>
+              <a:spcBef>
+                <a:spcPts val="200"/>
+              </a:spcBef>
+              <a:spcAft>
+                <a:spcPts val="400"/>
+              </a:spcAft>
+              <a:buClr>
+                <a:schemeClr val="accent1"/>
+              </a:buClr>
+              <a:buFont typeface="Calibri" pitchFamily="34" charset="0"/>
+              <a:buChar char="◦"/>
+              <a:defRPr sz="1400" kern="1200">
+                <a:solidFill>
+                  <a:schemeClr val="tx1">
+                    <a:lumMod val="75000"/>
+                    <a:lumOff val="25000"/>
+                  </a:schemeClr>
+                </a:solidFill>
+                <a:latin typeface="+mn-lt"/>
+                <a:ea typeface="+mn-ea"/>
+                <a:cs typeface="+mn-cs"/>
+              </a:defRPr>
+            </a:lvl9pPr>
+          </a:lstStyle>
+          <a:p>
+            <a:pPr marL="0" indent="0" algn="just">
+              <a:buNone/>
             </a:pPr>
             <a:endParaRPr lang="en-US" sz="2400" dirty="0"/>
           </a:p>
-        </p:txBody>
-      </p:sp>
-      <p:pic>
-        <p:nvPicPr>
-          <p:cNvPr id="3" name="Picture 2">
-            <a:extLst>
-              <a:ext uri="{FF2B5EF4-FFF2-40B4-BE49-F238E27FC236}">
-                <a16:creationId xmlns:a16="http://schemas.microsoft.com/office/drawing/2014/main" id="{C9855B2A-13BC-4577-9769-3759835E8035}"/>
-              </a:ext>
-            </a:extLst>
-          </p:cNvPr>
-          <p:cNvPicPr>
-            <a:picLocks noChangeAspect="1"/>
-          </p:cNvPicPr>
-          <p:nvPr/>
-        </p:nvPicPr>
-        <p:blipFill>
-          <a:blip r:embed="rId3">
-            <a:extLst>
-              <a:ext uri="{28A0092B-C50C-407E-A947-70E740481C1C}">
-                <a14:useLocalDpi xmlns:a14="http://schemas.microsoft.com/office/drawing/2010/main" val="0"/>
-              </a:ext>
-            </a:extLst>
-          </a:blip>
-          <a:stretch>
-            <a:fillRect/>
-          </a:stretch>
-        </p:blipFill>
-        <p:spPr>
-          <a:xfrm>
-            <a:off x="0" y="3671225"/>
-            <a:ext cx="4557485" cy="2160365"/>
-          </a:xfrm>
-          <a:prstGeom prst="rect">
-            <a:avLst/>
-          </a:prstGeom>
-        </p:spPr>
-      </p:pic>
+          <a:p>
+            <a:pPr marL="0" indent="0" algn="just">
+              <a:buNone/>
+            </a:pPr>
+            <a:r>
+              <a:rPr lang="en-US" sz="2400" b="1" dirty="0">
+                <a:effectLst>
+                  <a:outerShdw blurRad="38100" dist="38100" dir="2700000" algn="tl">
+                    <a:srgbClr val="000000">
+                      <a:alpha val="43137"/>
+                    </a:srgbClr>
+                  </a:outerShdw>
+                </a:effectLst>
+              </a:rPr>
+              <a:t>Key Advantages of PIE:</a:t>
+            </a:r>
+          </a:p>
+          <a:p>
+            <a:pPr marL="0" indent="0" algn="just">
+              <a:buNone/>
+            </a:pPr>
+            <a:r>
+              <a:rPr lang="en-US" sz="2400" dirty="0"/>
+              <a:t>• Higher success rates for all packets types FTP , web and FTP</a:t>
+            </a:r>
+          </a:p>
+          <a:p>
+            <a:pPr marL="0" indent="0" algn="just">
+              <a:buNone/>
+            </a:pPr>
+            <a:r>
+              <a:rPr lang="en-US" sz="2400" dirty="0"/>
+              <a:t>• 30% faster processing time</a:t>
+            </a:r>
+          </a:p>
+          <a:p>
+            <a:pPr marL="0" indent="0" algn="just">
+              <a:buNone/>
+            </a:pPr>
+            <a:r>
+              <a:rPr lang="en-US" sz="2400" dirty="0"/>
+              <a:t>• Better overall performance</a:t>
+            </a:r>
+          </a:p>
+          <a:p>
+            <a:pPr marL="0" indent="0" algn="just">
+              <a:buNone/>
+            </a:pPr>
+            <a:r>
+              <a:rPr lang="en-US" sz="2400" dirty="0"/>
+              <a:t>• More efficient queue management</a:t>
+            </a:r>
+          </a:p>
+        </p:txBody>
+      </p:sp>
     </p:spTree>
     <p:extLst>
       <p:ext uri="{BB962C8B-B14F-4D97-AF65-F5344CB8AC3E}">
-        <p14:creationId xmlns:p14="http://schemas.microsoft.com/office/powerpoint/2010/main" val="1907870354"/>
+        <p14:creationId xmlns:p14="http://schemas.microsoft.com/office/powerpoint/2010/main" val="547997955"/>
       </p:ext>
     </p:extLst>
   </p:cSld>
@@ -8020,7 +8191,12 @@
             <p:ph type="title"/>
           </p:nvPr>
         </p:nvSpPr>
-        <p:spPr/>
+        <p:spPr>
+          <a:xfrm>
+            <a:off x="1071210" y="476672"/>
+            <a:ext cx="10058400" cy="1450757"/>
+          </a:xfrm>
+        </p:spPr>
         <p:txBody>
           <a:bodyPr>
             <a:normAutofit/>
@@ -8028,65 +8204,23 @@
           <a:lstStyle/>
           <a:p>
             <a:r>
-              <a:rPr lang="en-US" dirty="0">
+              <a:rPr lang="en-US" sz="3600" b="1" dirty="0">
                 <a:solidFill>
                   <a:srgbClr val="FF0000"/>
                 </a:solidFill>
               </a:rPr>
-              <a:t>4. Results and Analysis</a:t>
+              <a:t>6. Future Improvements</a:t>
             </a:r>
             <a:br>
-              <a:rPr lang="en-US" dirty="0"/>
+              <a:rPr lang="en-US" b="1" dirty="0"/>
             </a:br>
-            <a:endParaRPr lang="en-US" dirty="0"/>
-          </a:p>
-        </p:txBody>
-      </p:sp>
-      <p:pic>
-        <p:nvPicPr>
-          <p:cNvPr id="7" name="Picture 6">
-            <a:extLst>
-              <a:ext uri="{FF2B5EF4-FFF2-40B4-BE49-F238E27FC236}">
-                <a16:creationId xmlns:a16="http://schemas.microsoft.com/office/drawing/2014/main" id="{99086AD4-87C9-46C8-B591-A55FBB126EE5}"/>
-              </a:ext>
-            </a:extLst>
-          </p:cNvPr>
-          <p:cNvPicPr>
-            <a:picLocks noChangeAspect="1"/>
-          </p:cNvPicPr>
-          <p:nvPr/>
-        </p:nvPicPr>
-        <p:blipFill>
-          <a:blip r:embed="rId2">
-            <a:extLst>
-              <a:ext uri="{28A0092B-C50C-407E-A947-70E740481C1C}">
-                <a14:useLocalDpi xmlns:a14="http://schemas.microsoft.com/office/drawing/2010/main" val="0"/>
-              </a:ext>
-            </a:extLst>
-          </a:blip>
-          <a:stretch>
-            <a:fillRect/>
-          </a:stretch>
-        </p:blipFill>
-        <p:spPr>
-          <a:xfrm>
-            <a:off x="4632160" y="1196752"/>
-            <a:ext cx="7559840" cy="5034854"/>
-          </a:xfrm>
-          <a:prstGeom prst="rect">
-            <a:avLst/>
-          </a:prstGeom>
-        </p:spPr>
-      </p:pic>
-      <p:sp>
-        <p:nvSpPr>
-          <p:cNvPr id="4" name="عنصر نائب للمحتوى 2">
-            <a:extLst>
-              <a:ext uri="{FF2B5EF4-FFF2-40B4-BE49-F238E27FC236}">
-                <a16:creationId xmlns:a16="http://schemas.microsoft.com/office/drawing/2014/main" id="{5692C18A-542F-40B8-B777-B098A3ED000A}"/>
-              </a:ext>
-            </a:extLst>
-          </p:cNvPr>
+            <a:endParaRPr lang="en-US" b="1" dirty="0"/>
+          </a:p>
+        </p:txBody>
+      </p:sp>
+      <p:sp>
+        <p:nvSpPr>
+          <p:cNvPr id="3" name="عنصر نائب للمحتوى 2"/>
           <p:cNvSpPr>
             <a:spLocks noGrp="1"/>
           </p:cNvSpPr>
@@ -8096,108 +8230,100 @@
         </p:nvSpPr>
         <p:spPr>
           <a:xfrm>
-            <a:off x="123663" y="1970173"/>
-            <a:ext cx="3240360" cy="1512168"/>
+            <a:off x="1044069" y="1340768"/>
+            <a:ext cx="11129609" cy="5544616"/>
           </a:xfrm>
         </p:spPr>
         <p:txBody>
           <a:bodyPr>
-            <a:normAutofit/>
+            <a:noAutofit/>
           </a:bodyPr>
           <a:lstStyle/>
           <a:p>
-            <a:pPr marL="0" indent="0" algn="ctr">
+            <a:pPr marL="0" indent="0" algn="l" rtl="0">
               <a:buNone/>
             </a:pPr>
             <a:r>
-              <a:rPr lang="en-US" sz="2400" b="1" dirty="0">
-                <a:solidFill>
-                  <a:srgbClr val="354154"/>
-                </a:solidFill>
-                <a:latin typeface="-apple-system"/>
+              <a:rPr lang="en-US" sz="2400" dirty="0">
+                <a:solidFill>
+                  <a:srgbClr val="0070C0"/>
+                </a:solidFill>
               </a:rPr>
-              <a:t>PIE ALGORITHM</a:t>
-            </a:r>
-          </a:p>
-          <a:p>
-            <a:pPr marL="457200" indent="-457200">
-              <a:buFont typeface="+mj-lt"/>
-              <a:buAutoNum type="arabicPeriod"/>
+              <a:t>Several enhancements can be made to the simulation framework:</a:t>
+            </a:r>
+          </a:p>
+          <a:p>
+            <a:pPr marL="0" indent="0" algn="l" rtl="0">
+              <a:buNone/>
             </a:pPr>
             <a:r>
-              <a:rPr lang="en-US" dirty="0">
-                <a:solidFill>
-                  <a:srgbClr val="354154"/>
-                </a:solidFill>
-                <a:latin typeface="-apple-system"/>
+              <a:rPr lang="en-US" sz="2400" dirty="0">
+                <a:solidFill>
+                  <a:srgbClr val="00B050"/>
+                </a:solidFill>
               </a:rPr>
-              <a:t>FTP dataset</a:t>
-            </a:r>
-          </a:p>
-          <a:p>
-            <a:pPr marL="457200" indent="-457200">
-              <a:buFont typeface="+mj-lt"/>
-              <a:buAutoNum type="arabicPeriod"/>
-            </a:pPr>
-            <a:r>
-              <a:rPr lang="en-US" dirty="0">
-                <a:solidFill>
-                  <a:srgbClr val="354154"/>
-                </a:solidFill>
-                <a:latin typeface="-apple-system"/>
+              <a:t>1. Network Topology:</a:t>
+            </a:r>
+          </a:p>
+          <a:p>
+            <a:pPr algn="l" rtl="0"/>
+            <a:r>
+              <a:rPr lang="en-US" sz="2400" dirty="0"/>
+              <a:t>Multi-node network simulations</a:t>
+            </a:r>
+          </a:p>
+          <a:p>
+            <a:pPr algn="l" rtl="0"/>
+            <a:r>
+              <a:rPr lang="en-US" sz="2400" dirty="0"/>
+              <a:t>Complex routing scenarios</a:t>
+            </a:r>
+          </a:p>
+          <a:p>
+            <a:r>
+              <a:rPr lang="en-US" sz="2400" dirty="0">
+                <a:solidFill>
+                  <a:srgbClr val="00B050"/>
+                </a:solidFill>
               </a:rPr>
-              <a:t>1000 packets </a:t>
-            </a:r>
-          </a:p>
-          <a:p>
-            <a:pPr marL="514350" indent="-514350">
-              <a:buFont typeface="+mj-lt"/>
-              <a:buAutoNum type="arabicPeriod"/>
-            </a:pPr>
+              <a:t>2.Visualization Enhancements:</a:t>
+            </a:r>
+          </a:p>
+          <a:p>
+            <a:r>
+              <a:rPr lang="en-US" sz="2400" dirty="0"/>
+              <a:t>Real-time monitoring dashboard</a:t>
+            </a:r>
+          </a:p>
+          <a:p>
+            <a:r>
+              <a:rPr lang="en-US" sz="2400" dirty="0"/>
+              <a:t>Interactive parameter tuning</a:t>
+            </a:r>
+          </a:p>
+          <a:p>
+            <a:r>
+              <a:rPr lang="en-US" sz="2400" dirty="0"/>
+              <a:t>Advanced statistical analysis tools</a:t>
+            </a:r>
+          </a:p>
+          <a:p>
             <a:endParaRPr lang="en-US" sz="2400" dirty="0"/>
           </a:p>
-        </p:txBody>
-      </p:sp>
-      <p:pic>
-        <p:nvPicPr>
-          <p:cNvPr id="3" name="Picture 2">
-            <a:extLst>
-              <a:ext uri="{FF2B5EF4-FFF2-40B4-BE49-F238E27FC236}">
-                <a16:creationId xmlns:a16="http://schemas.microsoft.com/office/drawing/2014/main" id="{C9855B2A-13BC-4577-9769-3759835E8035}"/>
-              </a:ext>
-            </a:extLst>
-          </p:cNvPr>
-          <p:cNvPicPr>
-            <a:picLocks noChangeAspect="1"/>
-          </p:cNvPicPr>
-          <p:nvPr/>
-        </p:nvPicPr>
-        <p:blipFill>
-          <a:blip r:embed="rId3">
-            <a:extLst>
-              <a:ext uri="{28A0092B-C50C-407E-A947-70E740481C1C}">
-                <a14:useLocalDpi xmlns:a14="http://schemas.microsoft.com/office/drawing/2010/main" val="0"/>
-              </a:ext>
-            </a:extLst>
-          </a:blip>
-          <a:stretch>
-            <a:fillRect/>
-          </a:stretch>
-        </p:blipFill>
-        <p:spPr>
-          <a:xfrm>
-            <a:off x="0" y="3564714"/>
-            <a:ext cx="4557485" cy="2373386"/>
-          </a:xfrm>
-          <a:prstGeom prst="rect">
-            <a:avLst/>
-          </a:prstGeom>
-        </p:spPr>
-      </p:pic>
+          <a:p>
+            <a:pPr algn="l" rtl="0"/>
+            <a:endParaRPr lang="en-US" sz="2400" dirty="0"/>
+          </a:p>
+          <a:p>
+            <a:pPr algn="l" rtl="0"/>
+            <a:endParaRPr lang="en-US" sz="2400" dirty="0"/>
+          </a:p>
+        </p:txBody>
+      </p:sp>
     </p:spTree>
     <p:extLst>
       <p:ext uri="{BB962C8B-B14F-4D97-AF65-F5344CB8AC3E}">
-        <p14:creationId xmlns:p14="http://schemas.microsoft.com/office/powerpoint/2010/main" val="3935559164"/>
+        <p14:creationId xmlns:p14="http://schemas.microsoft.com/office/powerpoint/2010/main" val="781779836"/>
       </p:ext>
     </p:extLst>
   </p:cSld>
@@ -8236,8 +8362,8 @@
         </p:nvSpPr>
         <p:spPr>
           <a:xfrm>
-            <a:off x="1071210" y="476672"/>
-            <a:ext cx="10058400" cy="1450757"/>
+            <a:off x="323730" y="692696"/>
+            <a:ext cx="10058400" cy="715284"/>
           </a:xfrm>
         </p:spPr>
         <p:txBody>
@@ -8251,129 +8377,79 @@
                 <a:solidFill>
                   <a:srgbClr val="FF0000"/>
                 </a:solidFill>
+                <a:effectLst>
+                  <a:outerShdw blurRad="38100" dist="38100" dir="2700000" algn="tl">
+                    <a:srgbClr val="000000">
+                      <a:alpha val="43137"/>
+                    </a:srgbClr>
+                  </a:outerShdw>
+                </a:effectLst>
               </a:rPr>
-              <a:t>5. Future Improvements</a:t>
-            </a:r>
-            <a:br>
-              <a:rPr lang="en-US" b="1" dirty="0"/>
-            </a:br>
-            <a:endParaRPr lang="en-US" b="1" dirty="0"/>
-          </a:p>
-        </p:txBody>
-      </p:sp>
-      <p:sp>
-        <p:nvSpPr>
-          <p:cNvPr id="3" name="عنصر نائب للمحتوى 2"/>
-          <p:cNvSpPr>
-            <a:spLocks noGrp="1"/>
-          </p:cNvSpPr>
-          <p:nvPr>
-            <p:ph idx="1"/>
-          </p:nvPr>
-        </p:nvSpPr>
-        <p:spPr>
-          <a:xfrm>
-            <a:off x="1062390" y="1844824"/>
-            <a:ext cx="11129609" cy="5544616"/>
-          </a:xfrm>
-        </p:spPr>
-        <p:txBody>
-          <a:bodyPr>
-            <a:noAutofit/>
-          </a:bodyPr>
-          <a:lstStyle/>
-          <a:p>
-            <a:pPr marL="0" indent="0" algn="l" rtl="0">
-              <a:buNone/>
-            </a:pPr>
-            <a:r>
-              <a:rPr lang="en-US" sz="2400" dirty="0">
-                <a:solidFill>
-                  <a:srgbClr val="0070C0"/>
-                </a:solidFill>
-              </a:rPr>
-              <a:t>Several enhancements can be made to the simulation framework:</a:t>
-            </a:r>
-          </a:p>
-          <a:p>
-            <a:pPr marL="0" indent="0" algn="l" rtl="0">
-              <a:buNone/>
-            </a:pPr>
-            <a:r>
-              <a:rPr lang="en-US" sz="2400" dirty="0">
-                <a:solidFill>
-                  <a:srgbClr val="00B050"/>
-                </a:solidFill>
-              </a:rPr>
-              <a:t>1. Network Topology:</a:t>
-            </a:r>
-          </a:p>
-          <a:p>
-            <a:pPr algn="l" rtl="0"/>
-            <a:r>
-              <a:rPr lang="en-US" sz="2400" dirty="0"/>
-              <a:t>Multi-node network simulations</a:t>
-            </a:r>
-          </a:p>
-          <a:p>
-            <a:pPr algn="l" rtl="0"/>
-            <a:r>
-              <a:rPr lang="en-US" sz="2400" dirty="0"/>
-              <a:t>Complex routing scenarios</a:t>
-            </a:r>
-          </a:p>
-          <a:p>
-            <a:pPr algn="l" rtl="0"/>
-            <a:r>
-              <a:rPr lang="en-US" sz="2400" dirty="0"/>
-              <a:t>Network congestion modeling.</a:t>
-            </a:r>
-          </a:p>
-          <a:p>
-            <a:r>
-              <a:rPr lang="en-US" sz="2400" dirty="0">
-                <a:solidFill>
-                  <a:srgbClr val="00B050"/>
-                </a:solidFill>
-              </a:rPr>
-              <a:t>2.Visualization Enhancements:</a:t>
-            </a:r>
-          </a:p>
-          <a:p>
-            <a:r>
-              <a:rPr lang="en-US" sz="2400" dirty="0"/>
-              <a:t>Real-time monitoring dashboard</a:t>
-            </a:r>
-          </a:p>
-          <a:p>
-            <a:r>
-              <a:rPr lang="en-US" sz="2400" dirty="0"/>
-              <a:t>Interactive parameter tuning</a:t>
-            </a:r>
-          </a:p>
-          <a:p>
-            <a:r>
-              <a:rPr lang="en-US" sz="2400" dirty="0"/>
-              <a:t>Advanced statistical analysis tools</a:t>
-            </a:r>
-          </a:p>
-          <a:p>
-            <a:endParaRPr lang="en-US" sz="2400" dirty="0"/>
-          </a:p>
-          <a:p>
-            <a:pPr algn="l" rtl="0"/>
-            <a:endParaRPr lang="en-US" sz="2400" dirty="0"/>
-          </a:p>
-          <a:p>
-            <a:pPr algn="l" rtl="0"/>
-            <a:endParaRPr lang="en-US" sz="2400" dirty="0"/>
-          </a:p>
-        </p:txBody>
-      </p:sp>
+              <a:t>Source Code</a:t>
+            </a:r>
+            <a:endParaRPr lang="en-US" b="1" dirty="0">
+              <a:effectLst>
+                <a:outerShdw blurRad="38100" dist="38100" dir="2700000" algn="tl">
+                  <a:srgbClr val="000000">
+                    <a:alpha val="43137"/>
+                  </a:srgbClr>
+                </a:outerShdw>
+              </a:effectLst>
+            </a:endParaRPr>
+          </a:p>
+        </p:txBody>
+      </p:sp>
+      <p:pic>
+        <p:nvPicPr>
+          <p:cNvPr id="1026" name="Picture 2" descr="https://api.qrserver.com/v1/create-qr-code/?data=https%3A%2F%2Fgithub.com%2FThanoon12k%2FROUTER-AQM-FIFO-CODEL-PIE-comparison">
+            <a:extLst>
+              <a:ext uri="{FF2B5EF4-FFF2-40B4-BE49-F238E27FC236}">
+                <a16:creationId xmlns:a16="http://schemas.microsoft.com/office/drawing/2014/main" id="{23457B70-C945-4F16-BAC2-D14EB75D860E}"/>
+              </a:ext>
+            </a:extLst>
+          </p:cNvPr>
+          <p:cNvPicPr>
+            <a:picLocks noChangeAspect="1" noChangeArrowheads="1"/>
+          </p:cNvPicPr>
+          <p:nvPr/>
+        </p:nvPicPr>
+        <p:blipFill>
+          <a:blip r:embed="rId2">
+            <a:extLst>
+              <a:ext uri="{28A0092B-C50C-407E-A947-70E740481C1C}">
+                <a14:useLocalDpi xmlns:a14="http://schemas.microsoft.com/office/drawing/2010/main" val="0"/>
+              </a:ext>
+            </a:extLst>
+          </a:blip>
+          <a:srcRect/>
+          <a:stretch>
+            <a:fillRect/>
+          </a:stretch>
+        </p:blipFill>
+        <p:spPr bwMode="auto">
+          <a:xfrm>
+            <a:off x="4151784" y="1988840"/>
+            <a:ext cx="3888432" cy="3888432"/>
+          </a:xfrm>
+          <a:prstGeom prst="rect">
+            <a:avLst/>
+          </a:prstGeom>
+          <a:noFill/>
+          <a:extLst>
+            <a:ext uri="{909E8E84-426E-40DD-AFC4-6F175D3DCCD1}">
+              <a14:hiddenFill xmlns:a14="http://schemas.microsoft.com/office/drawing/2010/main">
+                <a:solidFill>
+                  <a:srgbClr val="FFFFFF"/>
+                </a:solidFill>
+              </a14:hiddenFill>
+            </a:ext>
+          </a:extLst>
+        </p:spPr>
+      </p:pic>
     </p:spTree>
     <p:extLst>
       <p:ext uri="{BB962C8B-B14F-4D97-AF65-F5344CB8AC3E}">
-        <p14:creationId xmlns:p14="http://schemas.microsoft.com/office/powerpoint/2010/main" val="2515068165"/>
+        <p14:creationId xmlns:p14="http://schemas.microsoft.com/office/powerpoint/2010/main" val="3692771314"/>
       </p:ext>
     </p:extLst>
   </p:cSld>
@@ -8402,546 +8478,17 @@
       </p:grpSpPr>
       <p:sp>
         <p:nvSpPr>
-          <p:cNvPr id="2" name="عنوان 1"/>
-          <p:cNvSpPr>
-            <a:spLocks noGrp="1"/>
-          </p:cNvSpPr>
-          <p:nvPr>
-            <p:ph type="title"/>
-          </p:nvPr>
-        </p:nvSpPr>
-        <p:spPr>
-          <a:xfrm>
-            <a:off x="263352" y="173247"/>
-            <a:ext cx="10058400" cy="1450757"/>
-          </a:xfrm>
-        </p:spPr>
-        <p:txBody>
-          <a:bodyPr>
-            <a:normAutofit/>
-          </a:bodyPr>
-          <a:lstStyle/>
-          <a:p>
-            <a:r>
-              <a:rPr lang="en-US" sz="3600" b="1" dirty="0">
-                <a:solidFill>
-                  <a:srgbClr val="FF0000"/>
-                </a:solidFill>
-              </a:rPr>
-              <a:t>5. Results </a:t>
-            </a:r>
-            <a:br>
-              <a:rPr lang="en-US" b="1" dirty="0"/>
-            </a:br>
-            <a:endParaRPr lang="en-US" b="1" dirty="0"/>
-          </a:p>
-        </p:txBody>
-      </p:sp>
-      <p:pic>
-        <p:nvPicPr>
-          <p:cNvPr id="6" name="Content Placeholder 5">
-            <a:extLst>
-              <a:ext uri="{FF2B5EF4-FFF2-40B4-BE49-F238E27FC236}">
-                <a16:creationId xmlns:a16="http://schemas.microsoft.com/office/drawing/2014/main" id="{FA3EAAC7-8B12-4A95-8A24-50E4F640A77D}"/>
-              </a:ext>
-            </a:extLst>
-          </p:cNvPr>
-          <p:cNvPicPr>
-            <a:picLocks noGrp="1" noChangeAspect="1"/>
-          </p:cNvPicPr>
+          <p:cNvPr id="3" name="عنصر نائب للمحتوى 2"/>
+          <p:cNvSpPr>
+            <a:spLocks noGrp="1"/>
+          </p:cNvSpPr>
           <p:nvPr>
             <p:ph idx="1"/>
           </p:nvPr>
-        </p:nvPicPr>
-        <p:blipFill>
-          <a:blip r:embed="rId2" cstate="print">
-            <a:extLst>
-              <a:ext uri="{28A0092B-C50C-407E-A947-70E740481C1C}">
-                <a14:useLocalDpi xmlns:a14="http://schemas.microsoft.com/office/drawing/2010/main" val="0"/>
-              </a:ext>
-            </a:extLst>
-          </a:blip>
-          <a:stretch>
-            <a:fillRect/>
-          </a:stretch>
-        </p:blipFill>
-        <p:spPr>
-          <a:xfrm>
-            <a:off x="2279576" y="1196752"/>
-            <a:ext cx="6688982" cy="5169441"/>
-          </a:xfrm>
-          <a:prstGeom prst="rect">
-            <a:avLst/>
-          </a:prstGeom>
-        </p:spPr>
-      </p:pic>
-    </p:spTree>
-    <p:extLst>
-      <p:ext uri="{BB962C8B-B14F-4D97-AF65-F5344CB8AC3E}">
-        <p14:creationId xmlns:p14="http://schemas.microsoft.com/office/powerpoint/2010/main" val="1371105871"/>
-      </p:ext>
-    </p:extLst>
-  </p:cSld>
-  <p:clrMapOvr>
-    <a:masterClrMapping/>
-  </p:clrMapOvr>
-</p:sld>
-</file>
-
-<file path=ppt/slides/slide27.xml><?xml version="1.0" encoding="utf-8"?>
-<p:sld xmlns:a="http://schemas.openxmlformats.org/drawingml/2006/main" xmlns:r="http://schemas.openxmlformats.org/officeDocument/2006/relationships" xmlns:p="http://schemas.openxmlformats.org/presentationml/2006/main">
-  <p:cSld>
-    <p:spTree>
-      <p:nvGrpSpPr>
-        <p:cNvPr id="1" name=""/>
-        <p:cNvGrpSpPr/>
-        <p:nvPr/>
-      </p:nvGrpSpPr>
-      <p:grpSpPr>
-        <a:xfrm>
-          <a:off x="0" y="0"/>
-          <a:ext cx="0" cy="0"/>
-          <a:chOff x="0" y="0"/>
-          <a:chExt cx="0" cy="0"/>
-        </a:xfrm>
-      </p:grpSpPr>
-      <p:sp>
-        <p:nvSpPr>
-          <p:cNvPr id="2" name="عنوان 1"/>
-          <p:cNvSpPr>
-            <a:spLocks noGrp="1"/>
-          </p:cNvSpPr>
-          <p:nvPr>
-            <p:ph type="title"/>
-          </p:nvPr>
-        </p:nvSpPr>
-        <p:spPr>
-          <a:xfrm>
-            <a:off x="263352" y="173247"/>
-            <a:ext cx="10058400" cy="1450757"/>
-          </a:xfrm>
-        </p:spPr>
-        <p:txBody>
-          <a:bodyPr>
-            <a:normAutofit/>
-          </a:bodyPr>
-          <a:lstStyle/>
-          <a:p>
-            <a:r>
-              <a:rPr lang="en-US" sz="3600" b="1" dirty="0">
-                <a:solidFill>
-                  <a:srgbClr val="FF0000"/>
-                </a:solidFill>
-                <a:effectLst>
-                  <a:outerShdw blurRad="38100" dist="38100" dir="2700000" algn="tl">
-                    <a:srgbClr val="000000">
-                      <a:alpha val="43137"/>
-                    </a:srgbClr>
-                  </a:outerShdw>
-                </a:effectLst>
-              </a:rPr>
-              <a:t>5. Results Discussion </a:t>
-            </a:r>
-            <a:br>
-              <a:rPr lang="en-US" b="1" dirty="0">
-                <a:effectLst>
-                  <a:outerShdw blurRad="38100" dist="38100" dir="2700000" algn="tl">
-                    <a:srgbClr val="000000">
-                      <a:alpha val="43137"/>
-                    </a:srgbClr>
-                  </a:outerShdw>
-                </a:effectLst>
-              </a:rPr>
-            </a:br>
-            <a:endParaRPr lang="en-US" b="1" dirty="0">
-              <a:effectLst>
-                <a:outerShdw blurRad="38100" dist="38100" dir="2700000" algn="tl">
-                  <a:srgbClr val="000000">
-                    <a:alpha val="43137"/>
-                  </a:srgbClr>
-                </a:outerShdw>
-              </a:effectLst>
-            </a:endParaRPr>
-          </a:p>
-        </p:txBody>
-      </p:sp>
-      <p:sp>
-        <p:nvSpPr>
-          <p:cNvPr id="7" name="عنصر نائب للمحتوى 2">
-            <a:extLst>
-              <a:ext uri="{FF2B5EF4-FFF2-40B4-BE49-F238E27FC236}">
-                <a16:creationId xmlns:a16="http://schemas.microsoft.com/office/drawing/2014/main" id="{E3C30BD4-14CB-4AFF-92DA-6F5FF09C3492}"/>
-              </a:ext>
-            </a:extLst>
-          </p:cNvPr>
-          <p:cNvSpPr txBox="1">
-            <a:spLocks/>
-          </p:cNvSpPr>
-          <p:nvPr/>
-        </p:nvSpPr>
-        <p:spPr>
-          <a:xfrm>
-            <a:off x="335360" y="1556792"/>
-            <a:ext cx="11129609" cy="5544616"/>
-          </a:xfrm>
-          <a:prstGeom prst="rect">
-            <a:avLst/>
-          </a:prstGeom>
-        </p:spPr>
-        <p:txBody>
-          <a:bodyPr vert="horz" lIns="0" tIns="45720" rIns="0" bIns="45720" rtlCol="0">
-            <a:noAutofit/>
-          </a:bodyPr>
-          <a:lstStyle>
-            <a:lvl1pPr marL="91440" indent="-91440" algn="l" defTabSz="914400" rtl="0" eaLnBrk="1" latinLnBrk="0" hangingPunct="1">
-              <a:lnSpc>
-                <a:spcPct val="90000"/>
-              </a:lnSpc>
-              <a:spcBef>
-                <a:spcPts val="1200"/>
-              </a:spcBef>
-              <a:spcAft>
-                <a:spcPts val="200"/>
-              </a:spcAft>
-              <a:buClr>
-                <a:schemeClr val="accent1"/>
-              </a:buClr>
-              <a:buSzPct val="100000"/>
-              <a:buFont typeface="Calibri" panose="020F0502020204030204" pitchFamily="34" charset="0"/>
-              <a:buChar char=" "/>
-              <a:defRPr sz="2000" kern="1200">
-                <a:solidFill>
-                  <a:schemeClr val="tx1">
-                    <a:lumMod val="75000"/>
-                    <a:lumOff val="25000"/>
-                  </a:schemeClr>
-                </a:solidFill>
-                <a:latin typeface="+mn-lt"/>
-                <a:ea typeface="+mn-ea"/>
-                <a:cs typeface="+mn-cs"/>
-              </a:defRPr>
-            </a:lvl1pPr>
-            <a:lvl2pPr marL="384048" indent="-182880" algn="l" defTabSz="914400" rtl="0" eaLnBrk="1" latinLnBrk="0" hangingPunct="1">
-              <a:lnSpc>
-                <a:spcPct val="90000"/>
-              </a:lnSpc>
-              <a:spcBef>
-                <a:spcPts val="200"/>
-              </a:spcBef>
-              <a:spcAft>
-                <a:spcPts val="400"/>
-              </a:spcAft>
-              <a:buClr>
-                <a:schemeClr val="accent1"/>
-              </a:buClr>
-              <a:buFont typeface="Calibri" pitchFamily="34" charset="0"/>
-              <a:buChar char="◦"/>
-              <a:defRPr sz="1800" kern="1200">
-                <a:solidFill>
-                  <a:schemeClr val="tx1">
-                    <a:lumMod val="75000"/>
-                    <a:lumOff val="25000"/>
-                  </a:schemeClr>
-                </a:solidFill>
-                <a:latin typeface="+mn-lt"/>
-                <a:ea typeface="+mn-ea"/>
-                <a:cs typeface="+mn-cs"/>
-              </a:defRPr>
-            </a:lvl2pPr>
-            <a:lvl3pPr marL="566928" indent="-182880" algn="l" defTabSz="914400" rtl="0" eaLnBrk="1" latinLnBrk="0" hangingPunct="1">
-              <a:lnSpc>
-                <a:spcPct val="90000"/>
-              </a:lnSpc>
-              <a:spcBef>
-                <a:spcPts val="200"/>
-              </a:spcBef>
-              <a:spcAft>
-                <a:spcPts val="400"/>
-              </a:spcAft>
-              <a:buClr>
-                <a:schemeClr val="accent1"/>
-              </a:buClr>
-              <a:buFont typeface="Calibri" pitchFamily="34" charset="0"/>
-              <a:buChar char="◦"/>
-              <a:defRPr sz="1400" kern="1200">
-                <a:solidFill>
-                  <a:schemeClr val="tx1">
-                    <a:lumMod val="75000"/>
-                    <a:lumOff val="25000"/>
-                  </a:schemeClr>
-                </a:solidFill>
-                <a:latin typeface="+mn-lt"/>
-                <a:ea typeface="+mn-ea"/>
-                <a:cs typeface="+mn-cs"/>
-              </a:defRPr>
-            </a:lvl3pPr>
-            <a:lvl4pPr marL="749808" indent="-182880" algn="l" defTabSz="914400" rtl="0" eaLnBrk="1" latinLnBrk="0" hangingPunct="1">
-              <a:lnSpc>
-                <a:spcPct val="90000"/>
-              </a:lnSpc>
-              <a:spcBef>
-                <a:spcPts val="200"/>
-              </a:spcBef>
-              <a:spcAft>
-                <a:spcPts val="400"/>
-              </a:spcAft>
-              <a:buClr>
-                <a:schemeClr val="accent1"/>
-              </a:buClr>
-              <a:buFont typeface="Calibri" pitchFamily="34" charset="0"/>
-              <a:buChar char="◦"/>
-              <a:defRPr sz="1400" kern="1200">
-                <a:solidFill>
-                  <a:schemeClr val="tx1">
-                    <a:lumMod val="75000"/>
-                    <a:lumOff val="25000"/>
-                  </a:schemeClr>
-                </a:solidFill>
-                <a:latin typeface="+mn-lt"/>
-                <a:ea typeface="+mn-ea"/>
-                <a:cs typeface="+mn-cs"/>
-              </a:defRPr>
-            </a:lvl4pPr>
-            <a:lvl5pPr marL="932688" indent="-182880" algn="l" defTabSz="914400" rtl="0" eaLnBrk="1" latinLnBrk="0" hangingPunct="1">
-              <a:lnSpc>
-                <a:spcPct val="90000"/>
-              </a:lnSpc>
-              <a:spcBef>
-                <a:spcPts val="200"/>
-              </a:spcBef>
-              <a:spcAft>
-                <a:spcPts val="400"/>
-              </a:spcAft>
-              <a:buClr>
-                <a:schemeClr val="accent1"/>
-              </a:buClr>
-              <a:buFont typeface="Calibri" pitchFamily="34" charset="0"/>
-              <a:buChar char="◦"/>
-              <a:defRPr sz="1400" kern="1200">
-                <a:solidFill>
-                  <a:schemeClr val="tx1">
-                    <a:lumMod val="75000"/>
-                    <a:lumOff val="25000"/>
-                  </a:schemeClr>
-                </a:solidFill>
-                <a:latin typeface="+mn-lt"/>
-                <a:ea typeface="+mn-ea"/>
-                <a:cs typeface="+mn-cs"/>
-              </a:defRPr>
-            </a:lvl5pPr>
-            <a:lvl6pPr marL="1100000" indent="-228600" algn="l" defTabSz="914400" rtl="0" eaLnBrk="1" latinLnBrk="0" hangingPunct="1">
-              <a:lnSpc>
-                <a:spcPct val="90000"/>
-              </a:lnSpc>
-              <a:spcBef>
-                <a:spcPts val="200"/>
-              </a:spcBef>
-              <a:spcAft>
-                <a:spcPts val="400"/>
-              </a:spcAft>
-              <a:buClr>
-                <a:schemeClr val="accent1"/>
-              </a:buClr>
-              <a:buFont typeface="Calibri" pitchFamily="34" charset="0"/>
-              <a:buChar char="◦"/>
-              <a:defRPr sz="1400" kern="1200">
-                <a:solidFill>
-                  <a:schemeClr val="tx1">
-                    <a:lumMod val="75000"/>
-                    <a:lumOff val="25000"/>
-                  </a:schemeClr>
-                </a:solidFill>
-                <a:latin typeface="+mn-lt"/>
-                <a:ea typeface="+mn-ea"/>
-                <a:cs typeface="+mn-cs"/>
-              </a:defRPr>
-            </a:lvl6pPr>
-            <a:lvl7pPr marL="1300000" indent="-228600" algn="l" defTabSz="914400" rtl="0" eaLnBrk="1" latinLnBrk="0" hangingPunct="1">
-              <a:lnSpc>
-                <a:spcPct val="90000"/>
-              </a:lnSpc>
-              <a:spcBef>
-                <a:spcPts val="200"/>
-              </a:spcBef>
-              <a:spcAft>
-                <a:spcPts val="400"/>
-              </a:spcAft>
-              <a:buClr>
-                <a:schemeClr val="accent1"/>
-              </a:buClr>
-              <a:buFont typeface="Calibri" pitchFamily="34" charset="0"/>
-              <a:buChar char="◦"/>
-              <a:defRPr sz="1400" kern="1200">
-                <a:solidFill>
-                  <a:schemeClr val="tx1">
-                    <a:lumMod val="75000"/>
-                    <a:lumOff val="25000"/>
-                  </a:schemeClr>
-                </a:solidFill>
-                <a:latin typeface="+mn-lt"/>
-                <a:ea typeface="+mn-ea"/>
-                <a:cs typeface="+mn-cs"/>
-              </a:defRPr>
-            </a:lvl7pPr>
-            <a:lvl8pPr marL="1500000" indent="-228600" algn="l" defTabSz="914400" rtl="0" eaLnBrk="1" latinLnBrk="0" hangingPunct="1">
-              <a:lnSpc>
-                <a:spcPct val="90000"/>
-              </a:lnSpc>
-              <a:spcBef>
-                <a:spcPts val="200"/>
-              </a:spcBef>
-              <a:spcAft>
-                <a:spcPts val="400"/>
-              </a:spcAft>
-              <a:buClr>
-                <a:schemeClr val="accent1"/>
-              </a:buClr>
-              <a:buFont typeface="Calibri" pitchFamily="34" charset="0"/>
-              <a:buChar char="◦"/>
-              <a:defRPr sz="1400" kern="1200">
-                <a:solidFill>
-                  <a:schemeClr val="tx1">
-                    <a:lumMod val="75000"/>
-                    <a:lumOff val="25000"/>
-                  </a:schemeClr>
-                </a:solidFill>
-                <a:latin typeface="+mn-lt"/>
-                <a:ea typeface="+mn-ea"/>
-                <a:cs typeface="+mn-cs"/>
-              </a:defRPr>
-            </a:lvl8pPr>
-            <a:lvl9pPr marL="1700000" indent="-228600" algn="l" defTabSz="914400" rtl="0" eaLnBrk="1" latinLnBrk="0" hangingPunct="1">
-              <a:lnSpc>
-                <a:spcPct val="90000"/>
-              </a:lnSpc>
-              <a:spcBef>
-                <a:spcPts val="200"/>
-              </a:spcBef>
-              <a:spcAft>
-                <a:spcPts val="400"/>
-              </a:spcAft>
-              <a:buClr>
-                <a:schemeClr val="accent1"/>
-              </a:buClr>
-              <a:buFont typeface="Calibri" pitchFamily="34" charset="0"/>
-              <a:buChar char="◦"/>
-              <a:defRPr sz="1400" kern="1200">
-                <a:solidFill>
-                  <a:schemeClr val="tx1">
-                    <a:lumMod val="75000"/>
-                    <a:lumOff val="25000"/>
-                  </a:schemeClr>
-                </a:solidFill>
-                <a:latin typeface="+mn-lt"/>
-                <a:ea typeface="+mn-ea"/>
-                <a:cs typeface="+mn-cs"/>
-              </a:defRPr>
-            </a:lvl9pPr>
-          </a:lstStyle>
-          <a:p>
-            <a:pPr marL="0" indent="0" algn="just">
-              <a:buNone/>
-            </a:pPr>
-            <a:endParaRPr lang="en-US" sz="2400" dirty="0"/>
-          </a:p>
-          <a:p>
-            <a:pPr marL="0" indent="0" algn="just">
-              <a:buNone/>
-            </a:pPr>
-            <a:r>
-              <a:rPr lang="en-US" sz="2400" b="1" dirty="0">
-                <a:effectLst>
-                  <a:outerShdw blurRad="38100" dist="38100" dir="2700000" algn="tl">
-                    <a:srgbClr val="000000">
-                      <a:alpha val="43137"/>
-                    </a:srgbClr>
-                  </a:outerShdw>
-                </a:effectLst>
-              </a:rPr>
-              <a:t>Key Advantages of PIE:</a:t>
-            </a:r>
-          </a:p>
-          <a:p>
-            <a:pPr marL="0" indent="0" algn="just">
-              <a:buNone/>
-            </a:pPr>
-            <a:r>
-              <a:rPr lang="en-US" sz="2400" dirty="0"/>
-              <a:t>• Higher success rates for web and FTP</a:t>
-            </a:r>
-          </a:p>
-          <a:p>
-            <a:pPr marL="0" indent="0" algn="just">
-              <a:buNone/>
-            </a:pPr>
-            <a:r>
-              <a:rPr lang="en-US" sz="2400" dirty="0"/>
-              <a:t>• 30% faster processing time</a:t>
-            </a:r>
-          </a:p>
-          <a:p>
-            <a:pPr marL="0" indent="0" algn="just">
-              <a:buNone/>
-            </a:pPr>
-            <a:r>
-              <a:rPr lang="en-US" sz="2400" dirty="0"/>
-              <a:t>• Better overall performance</a:t>
-            </a:r>
-          </a:p>
-          <a:p>
-            <a:pPr marL="0" indent="0" algn="just">
-              <a:buNone/>
-            </a:pPr>
-            <a:r>
-              <a:rPr lang="en-US" sz="2400" dirty="0"/>
-              <a:t>• More efficient queue management</a:t>
-            </a:r>
-          </a:p>
-        </p:txBody>
-      </p:sp>
-    </p:spTree>
-    <p:extLst>
-      <p:ext uri="{BB962C8B-B14F-4D97-AF65-F5344CB8AC3E}">
-        <p14:creationId xmlns:p14="http://schemas.microsoft.com/office/powerpoint/2010/main" val="547997955"/>
-      </p:ext>
-    </p:extLst>
-  </p:cSld>
-  <p:clrMapOvr>
-    <a:masterClrMapping/>
-  </p:clrMapOvr>
-</p:sld>
-</file>
-
-<file path=ppt/slides/slide28.xml><?xml version="1.0" encoding="utf-8"?>
-<p:sld xmlns:a="http://schemas.openxmlformats.org/drawingml/2006/main" xmlns:r="http://schemas.openxmlformats.org/officeDocument/2006/relationships" xmlns:p="http://schemas.openxmlformats.org/presentationml/2006/main">
-  <p:cSld>
-    <p:spTree>
-      <p:nvGrpSpPr>
-        <p:cNvPr id="1" name=""/>
-        <p:cNvGrpSpPr/>
-        <p:nvPr/>
-      </p:nvGrpSpPr>
-      <p:grpSpPr>
-        <a:xfrm>
-          <a:off x="0" y="0"/>
-          <a:ext cx="0" cy="0"/>
-          <a:chOff x="0" y="0"/>
-          <a:chExt cx="0" cy="0"/>
-        </a:xfrm>
-      </p:grpSpPr>
-      <p:sp>
-        <p:nvSpPr>
-          <p:cNvPr id="3" name="عنصر نائب للمحتوى 2"/>
-          <p:cNvSpPr>
-            <a:spLocks noGrp="1"/>
-          </p:cNvSpPr>
-          <p:nvPr>
-            <p:ph idx="1"/>
-          </p:nvPr>
-        </p:nvSpPr>
-        <p:spPr>
-          <a:xfrm>
-            <a:off x="1199456" y="2564904"/>
+        </p:nvSpPr>
+        <p:spPr>
+          <a:xfrm>
+            <a:off x="1066800" y="2204864"/>
             <a:ext cx="10058400" cy="2159330"/>
           </a:xfrm>
         </p:spPr>
@@ -9133,44 +8680,9 @@
           <a:chExt cx="0" cy="0"/>
         </a:xfrm>
       </p:grpSpPr>
-      <p:pic>
-        <p:nvPicPr>
-          <p:cNvPr id="7" name="عنصر نائب للمحتوى 6"/>
-          <p:cNvPicPr>
-            <a:picLocks noGrp="1" noChangeAspect="1"/>
-          </p:cNvPicPr>
-          <p:nvPr>
-            <p:ph idx="1"/>
-          </p:nvPr>
-        </p:nvPicPr>
-        <p:blipFill>
-          <a:blip r:embed="rId2">
-            <a:extLst>
-              <a:ext uri="{28A0092B-C50C-407E-A947-70E740481C1C}">
-                <a14:useLocalDpi xmlns:a14="http://schemas.microsoft.com/office/drawing/2010/main" val="0"/>
-              </a:ext>
-            </a:extLst>
-          </a:blip>
-          <a:stretch>
-            <a:fillRect/>
-          </a:stretch>
-        </p:blipFill>
-        <p:spPr>
-          <a:xfrm>
-            <a:off x="0" y="980728"/>
-            <a:ext cx="11784632" cy="5145436"/>
-          </a:xfrm>
-        </p:spPr>
-      </p:pic>
-      <p:sp>
-        <p:nvSpPr>
-          <p:cNvPr id="5" name="عنوان 1">
-            <a:extLst>
-              <a:ext uri="{FF2B5EF4-FFF2-40B4-BE49-F238E27FC236}">
-                <a16:creationId xmlns:a16="http://schemas.microsoft.com/office/drawing/2014/main" id="{307463B0-DF6F-4CF2-ABFB-E62F107F5374}"/>
-              </a:ext>
-            </a:extLst>
-          </p:cNvPr>
+      <p:sp>
+        <p:nvSpPr>
+          <p:cNvPr id="2" name="عنوان 1"/>
           <p:cNvSpPr>
             <a:spLocks noGrp="1"/>
           </p:cNvSpPr>
@@ -9180,8 +8692,8 @@
         </p:nvSpPr>
         <p:spPr>
           <a:xfrm>
-            <a:off x="263352" y="255349"/>
-            <a:ext cx="3301008" cy="1450757"/>
+            <a:off x="1097280" y="286603"/>
+            <a:ext cx="10058400" cy="1486213"/>
           </a:xfrm>
         </p:spPr>
         <p:txBody>
@@ -9190,26 +8702,244 @@
           </a:bodyPr>
           <a:lstStyle/>
           <a:p>
-            <a:pPr algn="ctr"/>
-            <a:r>
-              <a:rPr lang="en-US" sz="3600" b="1" dirty="0">
+            <a:r>
+              <a:rPr lang="en-US" b="1" dirty="0">
                 <a:solidFill>
                   <a:srgbClr val="FF0000"/>
                 </a:solidFill>
               </a:rPr>
-              <a:t>Project Overview</a:t>
+              <a:t>2. Algorithms</a:t>
             </a:r>
             <a:br>
-              <a:rPr lang="en-US" sz="3600" b="1" dirty="0"/>
+              <a:rPr lang="en-US" b="1" dirty="0"/>
             </a:br>
-            <a:endParaRPr lang="en-US" sz="3600" b="1" dirty="0"/>
+            <a:endParaRPr lang="en-US" dirty="0"/>
+          </a:p>
+        </p:txBody>
+      </p:sp>
+      <p:sp>
+        <p:nvSpPr>
+          <p:cNvPr id="3" name="عنصر نائب للمحتوى 2"/>
+          <p:cNvSpPr>
+            <a:spLocks noGrp="1"/>
+          </p:cNvSpPr>
+          <p:nvPr>
+            <p:ph idx="1"/>
+          </p:nvPr>
+        </p:nvSpPr>
+        <p:spPr>
+          <a:xfrm>
+            <a:off x="335360" y="1772816"/>
+            <a:ext cx="11856640" cy="4353348"/>
+          </a:xfrm>
+        </p:spPr>
+        <p:txBody>
+          <a:bodyPr>
+            <a:normAutofit fontScale="92500" lnSpcReduction="20000"/>
+          </a:bodyPr>
+          <a:lstStyle/>
+          <a:p>
+            <a:pPr marL="0" indent="0" algn="l">
+              <a:buNone/>
+            </a:pPr>
+            <a:r>
+              <a:rPr lang="en-US" sz="2800" b="1" dirty="0"/>
+              <a:t>2.1 FIFO Algorithm</a:t>
+            </a:r>
+          </a:p>
+          <a:p>
+            <a:pPr marL="0" indent="0" algn="l">
+              <a:buNone/>
+            </a:pPr>
+            <a:r>
+              <a:rPr lang="en-US" sz="2800" dirty="0"/>
+              <a:t>The First-In-First-Out algorithm implements a simple queue management strategy where packets are processed strictly in arrival order. Its mathematical model is defined as:</a:t>
+            </a:r>
+          </a:p>
+          <a:p>
+            <a:pPr marL="0" indent="0" algn="l">
+              <a:buNone/>
+            </a:pPr>
+            <a:r>
+              <a:rPr lang="en-US" sz="2800" i="1" dirty="0"/>
+              <a:t>Q</a:t>
+            </a:r>
+            <a:r>
+              <a:rPr lang="en-US" sz="2800" dirty="0"/>
+              <a:t>(</a:t>
+            </a:r>
+            <a:r>
+              <a:rPr lang="en-US" sz="2800" i="1" dirty="0"/>
+              <a:t>t</a:t>
+            </a:r>
+            <a:r>
+              <a:rPr lang="en-US" sz="2800" dirty="0"/>
+              <a:t>)=</a:t>
+            </a:r>
+            <a:r>
+              <a:rPr lang="en-US" sz="2800" i="1" dirty="0"/>
+              <a:t>min</a:t>
+            </a:r>
+            <a:r>
+              <a:rPr lang="en-US" sz="2800" dirty="0"/>
+              <a:t>(</a:t>
+            </a:r>
+            <a:r>
+              <a:rPr lang="en-US" sz="2800" i="1" dirty="0"/>
+              <a:t>Q</a:t>
+            </a:r>
+            <a:r>
+              <a:rPr lang="en-US" sz="2800" dirty="0"/>
+              <a:t>(</a:t>
+            </a:r>
+            <a:r>
+              <a:rPr lang="en-US" sz="2800" i="1" dirty="0"/>
+              <a:t>t</a:t>
+            </a:r>
+            <a:r>
+              <a:rPr lang="en-US" sz="2800" dirty="0"/>
+              <a:t>−1)+</a:t>
+            </a:r>
+            <a:r>
+              <a:rPr lang="en-US" sz="2800" i="1" dirty="0"/>
+              <a:t>P</a:t>
+            </a:r>
+            <a:r>
+              <a:rPr lang="en-US" sz="2800" dirty="0"/>
+              <a:t>(</a:t>
+            </a:r>
+            <a:r>
+              <a:rPr lang="en-US" sz="2800" i="1" dirty="0"/>
+              <a:t>t</a:t>
+            </a:r>
+            <a:r>
+              <a:rPr lang="en-US" sz="2800" dirty="0"/>
+              <a:t>),</a:t>
+            </a:r>
+            <a:r>
+              <a:rPr lang="en-US" sz="2800" i="1" dirty="0"/>
+              <a:t>C</a:t>
+            </a:r>
+            <a:r>
+              <a:rPr lang="en-US" sz="2800" dirty="0"/>
+              <a:t>)</a:t>
+            </a:r>
+          </a:p>
+          <a:p>
+            <a:pPr marL="0" indent="0">
+              <a:buNone/>
+            </a:pPr>
+            <a:r>
+              <a:rPr lang="en-US" sz="2800" dirty="0"/>
+              <a:t>If C &gt; [ </a:t>
+            </a:r>
+            <a:r>
+              <a:rPr lang="en-US" sz="2800" i="1" dirty="0"/>
+              <a:t>Q</a:t>
+            </a:r>
+            <a:r>
+              <a:rPr lang="en-US" sz="2800" dirty="0"/>
+              <a:t>(</a:t>
+            </a:r>
+            <a:r>
+              <a:rPr lang="en-US" sz="2800" i="1" dirty="0"/>
+              <a:t>t</a:t>
+            </a:r>
+            <a:r>
+              <a:rPr lang="en-US" sz="2800" dirty="0"/>
+              <a:t>−1)+</a:t>
+            </a:r>
+            <a:r>
+              <a:rPr lang="en-US" sz="2800" i="1" dirty="0"/>
+              <a:t>P</a:t>
+            </a:r>
+            <a:r>
+              <a:rPr lang="en-US" sz="2800" dirty="0"/>
+              <a:t>(</a:t>
+            </a:r>
+            <a:r>
+              <a:rPr lang="en-US" sz="2800" i="1" dirty="0"/>
+              <a:t>t</a:t>
+            </a:r>
+            <a:r>
+              <a:rPr lang="en-US" sz="2800" dirty="0"/>
+              <a:t>) ] </a:t>
+            </a:r>
+            <a:r>
+              <a:rPr lang="en-US" sz="2800" dirty="0">
+                <a:highlight>
+                  <a:srgbClr val="FFFF00"/>
+                </a:highlight>
+              </a:rPr>
+              <a:t>add the packet to the queue </a:t>
+            </a:r>
+            <a:r>
+              <a:rPr lang="en-US" sz="2800" dirty="0"/>
+              <a:t>else </a:t>
+            </a:r>
+            <a:r>
+              <a:rPr lang="en-US" sz="2800" dirty="0">
+                <a:highlight>
+                  <a:srgbClr val="FF0000"/>
+                </a:highlight>
+              </a:rPr>
+              <a:t>delete first packet in the queue</a:t>
+            </a:r>
+          </a:p>
+          <a:p>
+            <a:pPr marL="0" indent="0" algn="l">
+              <a:buNone/>
+            </a:pPr>
+            <a:r>
+              <a:rPr lang="en-US" sz="2800" dirty="0">
+                <a:solidFill>
+                  <a:srgbClr val="0070C0"/>
+                </a:solidFill>
+                <a:latin typeface="-apple-system"/>
+              </a:rPr>
+              <a:t>Where:</a:t>
+            </a:r>
+          </a:p>
+          <a:p>
+            <a:pPr algn="l" rtl="0"/>
+            <a:r>
+              <a:rPr lang="en-US" sz="2800" dirty="0">
+                <a:latin typeface="-apple-system"/>
+              </a:rPr>
+              <a:t>Q(t): Current queue size</a:t>
+            </a:r>
+          </a:p>
+          <a:p>
+            <a:r>
+              <a:rPr lang="en-US" sz="2800" i="1" dirty="0"/>
+              <a:t>P</a:t>
+            </a:r>
+            <a:r>
+              <a:rPr lang="en-US" sz="2800" dirty="0">
+                <a:latin typeface="-apple-system"/>
+              </a:rPr>
+              <a:t>(t): Arriving packets</a:t>
+            </a:r>
+          </a:p>
+          <a:p>
+            <a:pPr algn="l" rtl="0"/>
+            <a:r>
+              <a:rPr lang="en-US" sz="2800" dirty="0">
+                <a:latin typeface="-apple-system"/>
+              </a:rPr>
+              <a:t>C: Queue capacity</a:t>
+            </a:r>
+          </a:p>
+          <a:p>
+            <a:pPr algn="l" rtl="0"/>
+            <a:endParaRPr lang="en-US" sz="2800" dirty="0"/>
           </a:p>
         </p:txBody>
       </p:sp>
     </p:spTree>
     <p:extLst>
       <p:ext uri="{BB962C8B-B14F-4D97-AF65-F5344CB8AC3E}">
-        <p14:creationId xmlns:p14="http://schemas.microsoft.com/office/powerpoint/2010/main" val="3711609882"/>
+        <p14:creationId xmlns:p14="http://schemas.microsoft.com/office/powerpoint/2010/main" val="3273686860"/>
       </p:ext>
     </p:extLst>
   </p:cSld>
@@ -9248,215 +8978,86 @@
         </p:nvSpPr>
         <p:spPr>
           <a:xfrm>
-            <a:off x="1097280" y="286603"/>
-            <a:ext cx="10058400" cy="1486213"/>
-          </a:xfrm>
-        </p:spPr>
+            <a:off x="1097280" y="675438"/>
+            <a:ext cx="10058400" cy="1450757"/>
+          </a:xfrm>
+        </p:spPr>
+        <p:txBody>
+          <a:bodyPr>
+            <a:normAutofit fontScale="90000"/>
+          </a:bodyPr>
+          <a:lstStyle/>
+          <a:p>
+            <a:r>
+              <a:rPr lang="en-US" dirty="0">
+                <a:solidFill>
+                  <a:srgbClr val="FF0000"/>
+                </a:solidFill>
+              </a:rPr>
+              <a:t>2.2 </a:t>
+            </a:r>
+            <a:r>
+              <a:rPr lang="en-US" b="1" dirty="0">
+                <a:solidFill>
+                  <a:srgbClr val="FF0000"/>
+                </a:solidFill>
+              </a:rPr>
+              <a:t>PIE</a:t>
+            </a:r>
+            <a:r>
+              <a:rPr lang="en-US" dirty="0">
+                <a:solidFill>
+                  <a:srgbClr val="FF0000"/>
+                </a:solidFill>
+              </a:rPr>
+              <a:t>(Proportional Integral controller Enhanced ) Algorithm</a:t>
+            </a:r>
+            <a:br>
+              <a:rPr lang="en-US" dirty="0"/>
+            </a:br>
+            <a:endParaRPr lang="en-US" dirty="0"/>
+          </a:p>
+        </p:txBody>
+      </p:sp>
+      <p:sp>
+        <p:nvSpPr>
+          <p:cNvPr id="3" name="عنصر نائب للمحتوى 2"/>
+          <p:cNvSpPr>
+            <a:spLocks noGrp="1"/>
+          </p:cNvSpPr>
+          <p:nvPr>
+            <p:ph idx="1"/>
+          </p:nvPr>
+        </p:nvSpPr>
+        <p:spPr/>
         <p:txBody>
           <a:bodyPr>
             <a:normAutofit/>
           </a:bodyPr>
           <a:lstStyle/>
           <a:p>
-            <a:r>
-              <a:rPr lang="en-US" b="1" dirty="0">
-                <a:solidFill>
-                  <a:srgbClr val="FF0000"/>
-                </a:solidFill>
-              </a:rPr>
-              <a:t>2. Algorithms</a:t>
-            </a:r>
-            <a:br>
-              <a:rPr lang="en-US" b="1" dirty="0"/>
-            </a:br>
-            <a:endParaRPr lang="en-US" dirty="0"/>
-          </a:p>
-        </p:txBody>
-      </p:sp>
-      <p:sp>
-        <p:nvSpPr>
-          <p:cNvPr id="3" name="عنصر نائب للمحتوى 2"/>
-          <p:cNvSpPr>
-            <a:spLocks noGrp="1"/>
-          </p:cNvSpPr>
-          <p:nvPr>
-            <p:ph idx="1"/>
-          </p:nvPr>
-        </p:nvSpPr>
-        <p:spPr>
-          <a:xfrm>
-            <a:off x="335360" y="1772816"/>
-            <a:ext cx="11856640" cy="4353348"/>
-          </a:xfrm>
-        </p:spPr>
-        <p:txBody>
-          <a:bodyPr>
-            <a:normAutofit fontScale="92500" lnSpcReduction="20000"/>
-          </a:bodyPr>
-          <a:lstStyle/>
-          <a:p>
-            <a:pPr marL="0" indent="0" algn="l">
+            <a:pPr marL="0" indent="0" algn="just">
               <a:buNone/>
             </a:pPr>
             <a:r>
-              <a:rPr lang="en-US" sz="2800" b="1" dirty="0"/>
-              <a:t>2.1 FIFO Algorithm</a:t>
-            </a:r>
-          </a:p>
-          <a:p>
-            <a:pPr marL="0" indent="0" algn="l">
-              <a:buNone/>
-            </a:pPr>
-            <a:r>
-              <a:rPr lang="en-US" sz="2800" dirty="0"/>
-              <a:t>The First-In-First-Out algorithm implements a simple queue management strategy where packets are processed strictly in arrival order. Its mathematical model is defined as:</a:t>
-            </a:r>
-          </a:p>
-          <a:p>
-            <a:pPr marL="0" indent="0" algn="l">
-              <a:buNone/>
-            </a:pPr>
-            <a:r>
-              <a:rPr lang="en-US" sz="2800" i="1" dirty="0"/>
-              <a:t>Q</a:t>
-            </a:r>
-            <a:r>
-              <a:rPr lang="en-US" sz="2800" dirty="0"/>
-              <a:t>(</a:t>
-            </a:r>
-            <a:r>
-              <a:rPr lang="en-US" sz="2800" i="1" dirty="0"/>
-              <a:t>t</a:t>
-            </a:r>
-            <a:r>
-              <a:rPr lang="en-US" sz="2800" dirty="0"/>
-              <a:t>)=</a:t>
-            </a:r>
-            <a:r>
-              <a:rPr lang="en-US" sz="2800" i="1" dirty="0"/>
-              <a:t>min</a:t>
-            </a:r>
-            <a:r>
-              <a:rPr lang="en-US" sz="2800" dirty="0"/>
-              <a:t>(</a:t>
-            </a:r>
-            <a:r>
-              <a:rPr lang="en-US" sz="2800" i="1" dirty="0"/>
-              <a:t>Q</a:t>
-            </a:r>
-            <a:r>
-              <a:rPr lang="en-US" sz="2800" dirty="0"/>
-              <a:t>(</a:t>
-            </a:r>
-            <a:r>
-              <a:rPr lang="en-US" sz="2800" i="1" dirty="0"/>
-              <a:t>t</a:t>
-            </a:r>
-            <a:r>
-              <a:rPr lang="en-US" sz="2800" dirty="0"/>
-              <a:t>−1)+</a:t>
-            </a:r>
-            <a:r>
-              <a:rPr lang="en-US" sz="2800" i="1" dirty="0"/>
-              <a:t>A</a:t>
-            </a:r>
-            <a:r>
-              <a:rPr lang="en-US" sz="2800" dirty="0"/>
-              <a:t>(</a:t>
-            </a:r>
-            <a:r>
-              <a:rPr lang="en-US" sz="2800" i="1" dirty="0"/>
-              <a:t>t</a:t>
-            </a:r>
-            <a:r>
-              <a:rPr lang="en-US" sz="2800" dirty="0"/>
-              <a:t>)−</a:t>
-            </a:r>
-            <a:r>
-              <a:rPr lang="en-US" sz="2800" i="1" dirty="0"/>
-              <a:t>D</a:t>
-            </a:r>
-            <a:r>
-              <a:rPr lang="en-US" sz="2800" dirty="0"/>
-              <a:t>(</a:t>
-            </a:r>
-            <a:r>
-              <a:rPr lang="en-US" sz="2800" i="1" dirty="0"/>
-              <a:t>t</a:t>
-            </a:r>
-            <a:r>
-              <a:rPr lang="en-US" sz="2800" dirty="0"/>
-              <a:t>),</a:t>
-            </a:r>
-            <a:r>
-              <a:rPr lang="en-US" sz="2800" i="1" dirty="0"/>
-              <a:t>C</a:t>
-            </a:r>
-            <a:r>
-              <a:rPr lang="en-US" sz="2800" dirty="0"/>
-              <a:t>)</a:t>
-            </a:r>
-          </a:p>
-          <a:p>
-            <a:pPr marL="0" indent="0" algn="l">
-              <a:buNone/>
-            </a:pPr>
-            <a:r>
-              <a:rPr lang="en-US" sz="2800" dirty="0">
-                <a:solidFill>
-                  <a:srgbClr val="0070C0"/>
-                </a:solidFill>
-                <a:latin typeface="-apple-system"/>
-              </a:rPr>
-              <a:t>Where:</a:t>
-            </a:r>
-          </a:p>
-          <a:p>
-            <a:pPr algn="l" rtl="0"/>
-            <a:r>
-              <a:rPr lang="en-US" sz="2800" dirty="0">
-                <a:latin typeface="-apple-system"/>
-              </a:rPr>
-              <a:t>Q(t): Current queue size</a:t>
-            </a:r>
-          </a:p>
-          <a:p>
-            <a:pPr algn="l" rtl="0"/>
-            <a:r>
-              <a:rPr lang="en-US" sz="2800" dirty="0">
-                <a:latin typeface="-apple-system"/>
-              </a:rPr>
-              <a:t>A(t): Arriving packets</a:t>
-            </a:r>
-          </a:p>
-          <a:p>
-            <a:pPr algn="l" rtl="0"/>
-            <a:r>
-              <a:rPr lang="en-US" sz="2800" dirty="0">
-                <a:latin typeface="-apple-system"/>
-              </a:rPr>
-              <a:t>D(t): Departing packets</a:t>
-            </a:r>
-          </a:p>
-          <a:p>
-            <a:pPr algn="l" rtl="0"/>
-            <a:r>
-              <a:rPr lang="en-US" sz="2800" dirty="0">
-                <a:latin typeface="-apple-system"/>
-              </a:rPr>
-              <a:t>C: Queue capacity</a:t>
-            </a:r>
-          </a:p>
-          <a:p>
-            <a:pPr algn="l" rtl="0"/>
-            <a:endParaRPr lang="en-US" sz="2800" dirty="0"/>
+              <a:rPr lang="en-US" sz="3600" dirty="0"/>
+              <a:t>The PIE algorithm is an Active Queue Management (AQM) technique designed to reduce latency caused by excessive buffering in network queues, a problem commonly known as "</a:t>
+            </a:r>
+            <a:r>
+              <a:rPr lang="en-US" sz="3600" dirty="0" err="1"/>
+              <a:t>Bufferbloat</a:t>
+            </a:r>
+            <a:r>
+              <a:rPr lang="en-US" sz="3600" dirty="0"/>
+              <a:t>." PIE employs a Proportional-Integral (PI) controller to adjust the packet drop probability based on the difference between the current queuing delay and a target delay.</a:t>
+            </a:r>
           </a:p>
         </p:txBody>
       </p:sp>
     </p:spTree>
     <p:extLst>
       <p:ext uri="{BB962C8B-B14F-4D97-AF65-F5344CB8AC3E}">
-        <p14:creationId xmlns:p14="http://schemas.microsoft.com/office/powerpoint/2010/main" val="3273686860"/>
+        <p14:creationId xmlns:p14="http://schemas.microsoft.com/office/powerpoint/2010/main" val="1853031500"/>
       </p:ext>
     </p:extLst>
   </p:cSld>
@@ -9495,53 +9096,130 @@
         </p:nvSpPr>
         <p:spPr>
           <a:xfrm>
-            <a:off x="2927648" y="836712"/>
-            <a:ext cx="6552728" cy="580926"/>
+            <a:off x="1097280" y="1124744"/>
+            <a:ext cx="10058400" cy="396592"/>
           </a:xfrm>
         </p:spPr>
         <p:txBody>
           <a:bodyPr>
-            <a:normAutofit fontScale="90000"/>
+            <a:noAutofit/>
           </a:bodyPr>
           <a:lstStyle/>
           <a:p>
-            <a:endParaRPr lang="en-US" dirty="0"/>
+            <a:pPr algn="l" rtl="0"/>
+            <a:r>
+              <a:rPr lang="en-US" sz="3600" b="1" dirty="0">
+                <a:solidFill>
+                  <a:srgbClr val="FF0000"/>
+                </a:solidFill>
+              </a:rPr>
+              <a:t>How PIE work</a:t>
+            </a:r>
           </a:p>
         </p:txBody>
       </p:sp>
       <p:pic>
         <p:nvPicPr>
-          <p:cNvPr id="4" name="عنصر نائب للمحتوى 3"/>
+          <p:cNvPr id="3" name="Picture 2">
+            <a:extLst>
+              <a:ext uri="{FF2B5EF4-FFF2-40B4-BE49-F238E27FC236}">
+                <a16:creationId xmlns:a16="http://schemas.microsoft.com/office/drawing/2014/main" id="{BF09E7C8-EC14-4DDB-AC90-0B181DCCA38A}"/>
+              </a:ext>
+            </a:extLst>
+          </p:cNvPr>
           <p:cNvPicPr>
-            <a:picLocks noGrp="1" noChangeAspect="1"/>
+            <a:picLocks noChangeAspect="1"/>
           </p:cNvPicPr>
-          <p:nvPr>
-            <p:ph idx="1"/>
-          </p:nvPr>
+          <p:nvPr/>
         </p:nvPicPr>
         <p:blipFill>
-          <a:blip r:embed="rId2">
-            <a:extLst>
-              <a:ext uri="{28A0092B-C50C-407E-A947-70E740481C1C}">
-                <a14:useLocalDpi xmlns:a14="http://schemas.microsoft.com/office/drawing/2010/main" val="0"/>
-              </a:ext>
-            </a:extLst>
-          </a:blip>
+          <a:blip r:embed="rId2"/>
           <a:stretch>
             <a:fillRect/>
           </a:stretch>
         </p:blipFill>
         <p:spPr>
           <a:xfrm>
-            <a:off x="0" y="332656"/>
-            <a:ext cx="12191999" cy="6048672"/>
-          </a:xfrm>
+            <a:off x="1950016" y="1697208"/>
+            <a:ext cx="8352928" cy="4664111"/>
+          </a:xfrm>
+          <a:prstGeom prst="rect">
+            <a:avLst/>
+          </a:prstGeom>
         </p:spPr>
       </p:pic>
+      <p:sp>
+        <p:nvSpPr>
+          <p:cNvPr id="5" name="عنوان 1">
+            <a:extLst>
+              <a:ext uri="{FF2B5EF4-FFF2-40B4-BE49-F238E27FC236}">
+                <a16:creationId xmlns:a16="http://schemas.microsoft.com/office/drawing/2014/main" id="{09B21A93-CA26-4672-A36A-BDCE728963BA}"/>
+              </a:ext>
+            </a:extLst>
+          </p:cNvPr>
+          <p:cNvSpPr txBox="1">
+            <a:spLocks/>
+          </p:cNvSpPr>
+          <p:nvPr/>
+        </p:nvSpPr>
+        <p:spPr>
+          <a:xfrm>
+            <a:off x="9912424" y="5356740"/>
+            <a:ext cx="2808312" cy="753032"/>
+          </a:xfrm>
+          <a:prstGeom prst="rect">
+            <a:avLst/>
+          </a:prstGeom>
+        </p:spPr>
+        <p:txBody>
+          <a:bodyPr vert="horz" lIns="91440" tIns="45720" rIns="91440" bIns="45720" rtlCol="0" anchor="b">
+            <a:noAutofit/>
+          </a:bodyPr>
+          <a:lstStyle>
+            <a:lvl1pPr marL="0" algn="l" defTabSz="914400" rtl="0" eaLnBrk="1" latinLnBrk="0" hangingPunct="1">
+              <a:lnSpc>
+                <a:spcPct val="85000"/>
+              </a:lnSpc>
+              <a:spcBef>
+                <a:spcPct val="0"/>
+              </a:spcBef>
+              <a:buNone/>
+              <a:defRPr sz="4800" kern="1200" spc="-50" baseline="0">
+                <a:solidFill>
+                  <a:schemeClr val="tx1">
+                    <a:lumMod val="75000"/>
+                    <a:lumOff val="25000"/>
+                  </a:schemeClr>
+                </a:solidFill>
+                <a:latin typeface="+mj-lt"/>
+                <a:ea typeface="+mj-ea"/>
+                <a:cs typeface="+mj-cs"/>
+              </a:defRPr>
+            </a:lvl1pPr>
+          </a:lstStyle>
+          <a:p>
+            <a:r>
+              <a:rPr lang="en-US" sz="2000" b="1" dirty="0">
+                <a:solidFill>
+                  <a:schemeClr val="tx1"/>
+                </a:solidFill>
+                <a:effectLst>
+                  <a:outerShdw blurRad="38100" dist="38100" dir="2700000" algn="tl">
+                    <a:srgbClr val="000000">
+                      <a:alpha val="43137"/>
+                    </a:srgbClr>
+                  </a:outerShdw>
+                </a:effectLst>
+              </a:rPr>
+              <a:t>Source : RFC8033</a:t>
+            </a:r>
+          </a:p>
+        </p:txBody>
+      </p:sp>
     </p:spTree>
     <p:extLst>
       <p:ext uri="{BB962C8B-B14F-4D97-AF65-F5344CB8AC3E}">
-        <p14:creationId xmlns:p14="http://schemas.microsoft.com/office/powerpoint/2010/main" val="2689186906"/>
+        <p14:creationId xmlns:p14="http://schemas.microsoft.com/office/powerpoint/2010/main" val="1077249462"/>
       </p:ext>
     </p:extLst>
   </p:cSld>
@@ -9578,97 +9256,54 @@
             <p:ph type="title"/>
           </p:nvPr>
         </p:nvSpPr>
-        <p:spPr/>
+        <p:spPr>
+          <a:xfrm>
+            <a:off x="1097280" y="1300616"/>
+            <a:ext cx="10058400" cy="396592"/>
+          </a:xfrm>
+        </p:spPr>
         <p:txBody>
           <a:bodyPr>
-            <a:normAutofit/>
+            <a:noAutofit/>
           </a:bodyPr>
           <a:lstStyle/>
           <a:p>
-            <a:r>
-              <a:rPr lang="en-US" dirty="0">
+            <a:pPr algn="l" rtl="0"/>
+            <a:r>
+              <a:rPr lang="en-US" sz="3600" b="1" dirty="0">
                 <a:solidFill>
                   <a:srgbClr val="FF0000"/>
                 </a:solidFill>
               </a:rPr>
-              <a:t>2.2 PIE Algorithm</a:t>
-            </a:r>
-            <a:br>
-              <a:rPr lang="en-US" dirty="0"/>
-            </a:br>
-            <a:endParaRPr lang="en-US" dirty="0"/>
-          </a:p>
-        </p:txBody>
-      </p:sp>
-      <p:sp>
-        <p:nvSpPr>
-          <p:cNvPr id="3" name="عنصر نائب للمحتوى 2"/>
-          <p:cNvSpPr>
-            <a:spLocks noGrp="1"/>
-          </p:cNvSpPr>
-          <p:nvPr>
-            <p:ph idx="1"/>
-          </p:nvPr>
-        </p:nvSpPr>
-        <p:spPr/>
-        <p:txBody>
-          <a:bodyPr/>
-          <a:lstStyle/>
-          <a:p>
-            <a:pPr marL="0" indent="0" algn="l">
-              <a:buNone/>
-            </a:pPr>
-            <a:r>
-              <a:rPr lang="en-US" sz="2800" dirty="0"/>
-              <a:t>PIE implements active queue management using control theory principles. Its core components include:</a:t>
-            </a:r>
-          </a:p>
-          <a:p>
-            <a:pPr marL="514350" indent="-514350" algn="l" rtl="0">
-              <a:buFont typeface="+mj-lt"/>
-              <a:buAutoNum type="arabicPeriod"/>
-            </a:pPr>
-            <a:r>
-              <a:rPr lang="en-US" sz="2800" dirty="0"/>
-              <a:t>Delay Calculation</a:t>
-            </a:r>
-            <a:r>
-              <a:rPr lang="en-US" dirty="0"/>
-              <a:t>:</a:t>
-            </a:r>
-          </a:p>
-          <a:p>
-            <a:pPr marL="0" indent="0" algn="l" rtl="0">
-              <a:buNone/>
-            </a:pPr>
-            <a:endParaRPr lang="en-US" dirty="0"/>
+              <a:t>PIE drop Equation</a:t>
+            </a:r>
           </a:p>
         </p:txBody>
       </p:sp>
       <p:pic>
         <p:nvPicPr>
-          <p:cNvPr id="4" name="صورة 3"/>
+          <p:cNvPr id="6" name="Picture 5">
+            <a:extLst>
+              <a:ext uri="{FF2B5EF4-FFF2-40B4-BE49-F238E27FC236}">
+                <a16:creationId xmlns:a16="http://schemas.microsoft.com/office/drawing/2014/main" id="{0A319516-6EAC-4D7D-968E-41A71AAFB935}"/>
+              </a:ext>
+            </a:extLst>
+          </p:cNvPr>
           <p:cNvPicPr>
             <a:picLocks noChangeAspect="1"/>
           </p:cNvPicPr>
           <p:nvPr/>
         </p:nvPicPr>
         <p:blipFill>
-          <a:blip r:embed="rId3">
-            <a:extLst>
-              <a:ext uri="{28A0092B-C50C-407E-A947-70E740481C1C}">
-                <a14:useLocalDpi xmlns:a14="http://schemas.microsoft.com/office/drawing/2010/main" val="0"/>
-              </a:ext>
-            </a:extLst>
-          </a:blip>
+          <a:blip r:embed="rId2"/>
           <a:stretch>
             <a:fillRect/>
           </a:stretch>
         </p:blipFill>
         <p:spPr>
           <a:xfrm>
-            <a:off x="839416" y="3857414"/>
-            <a:ext cx="9188121" cy="1450756"/>
+            <a:off x="1038225" y="1916832"/>
+            <a:ext cx="10115550" cy="3952875"/>
           </a:xfrm>
           <a:prstGeom prst="rect">
             <a:avLst/>
@@ -9678,7 +9313,7 @@
     </p:spTree>
     <p:extLst>
       <p:ext uri="{BB962C8B-B14F-4D97-AF65-F5344CB8AC3E}">
-        <p14:creationId xmlns:p14="http://schemas.microsoft.com/office/powerpoint/2010/main" val="1853031500"/>
+        <p14:creationId xmlns:p14="http://schemas.microsoft.com/office/powerpoint/2010/main" val="3442606169"/>
       </p:ext>
     </p:extLst>
   </p:cSld>
@@ -9705,133 +9340,107 @@
           <a:chExt cx="0" cy="0"/>
         </a:xfrm>
       </p:grpSpPr>
-      <p:sp>
-        <p:nvSpPr>
-          <p:cNvPr id="2" name="عنوان 1"/>
-          <p:cNvSpPr>
-            <a:spLocks noGrp="1"/>
-          </p:cNvSpPr>
-          <p:nvPr>
-            <p:ph type="title"/>
-          </p:nvPr>
-        </p:nvSpPr>
-        <p:spPr>
-          <a:xfrm>
-            <a:off x="1097280" y="2083399"/>
-            <a:ext cx="10058400" cy="396592"/>
-          </a:xfrm>
-        </p:spPr>
-        <p:txBody>
-          <a:bodyPr>
-            <a:normAutofit fontScale="90000"/>
-          </a:bodyPr>
-          <a:lstStyle/>
-          <a:p>
-            <a:pPr algn="l" rtl="0"/>
-            <a:r>
-              <a:rPr lang="en-US" sz="2800" b="1" dirty="0"/>
-              <a:t>2.Error Signal Computation:</a:t>
-            </a:r>
-          </a:p>
-        </p:txBody>
-      </p:sp>
       <p:pic>
         <p:nvPicPr>
-          <p:cNvPr id="4" name="عنصر نائب للمحتوى 3"/>
-          <p:cNvPicPr>
-            <a:picLocks noGrp="1" noChangeAspect="1"/>
-          </p:cNvPicPr>
-          <p:nvPr>
-            <p:ph idx="1"/>
-          </p:nvPr>
-        </p:nvPicPr>
-        <p:blipFill>
-          <a:blip r:embed="rId2">
+          <p:cNvPr id="8" name="Picture 7">
             <a:extLst>
-              <a:ext uri="{28A0092B-C50C-407E-A947-70E740481C1C}">
-                <a14:useLocalDpi xmlns:a14="http://schemas.microsoft.com/office/drawing/2010/main" val="0"/>
+              <a:ext uri="{FF2B5EF4-FFF2-40B4-BE49-F238E27FC236}">
+                <a16:creationId xmlns:a16="http://schemas.microsoft.com/office/drawing/2014/main" id="{B129FFFF-BA2C-4453-9DFF-51B1133CCEEA}"/>
               </a:ext>
             </a:extLst>
-          </a:blip>
-          <a:stretch>
-            <a:fillRect/>
-          </a:stretch>
-        </p:blipFill>
-        <p:spPr>
-          <a:xfrm>
-            <a:off x="1352870" y="2900640"/>
-            <a:ext cx="6336704" cy="952633"/>
-          </a:xfrm>
-        </p:spPr>
-      </p:pic>
-      <p:sp>
-        <p:nvSpPr>
-          <p:cNvPr id="7" name="مستطيل 6"/>
-          <p:cNvSpPr/>
-          <p:nvPr/>
-        </p:nvSpPr>
-        <p:spPr>
-          <a:xfrm>
-            <a:off x="1097280" y="4273923"/>
-            <a:ext cx="4080476" cy="523220"/>
-          </a:xfrm>
-          <a:prstGeom prst="rect">
-            <a:avLst/>
-          </a:prstGeom>
-        </p:spPr>
-        <p:txBody>
-          <a:bodyPr wrap="none">
-            <a:spAutoFit/>
-          </a:bodyPr>
-          <a:lstStyle/>
-          <a:p>
-            <a:r>
-              <a:rPr lang="en-US" sz="2800" dirty="0">
-                <a:solidFill>
-                  <a:srgbClr val="354154"/>
-                </a:solidFill>
-                <a:latin typeface="-apple-system"/>
-              </a:rPr>
-              <a:t>3.Drop Probability Update:</a:t>
-            </a:r>
-            <a:endParaRPr lang="en-US" sz="2800" dirty="0"/>
-          </a:p>
-        </p:txBody>
-      </p:sp>
-      <p:pic>
-        <p:nvPicPr>
-          <p:cNvPr id="9" name="صورة 8"/>
+          </p:cNvPr>
           <p:cNvPicPr>
             <a:picLocks noChangeAspect="1"/>
           </p:cNvPicPr>
           <p:nvPr/>
         </p:nvPicPr>
         <p:blipFill>
-          <a:blip r:embed="rId3">
-            <a:extLst>
-              <a:ext uri="{28A0092B-C50C-407E-A947-70E740481C1C}">
-                <a14:useLocalDpi xmlns:a14="http://schemas.microsoft.com/office/drawing/2010/main" val="0"/>
-              </a:ext>
-            </a:extLst>
-          </a:blip>
+          <a:blip r:embed="rId2"/>
           <a:stretch>
             <a:fillRect/>
           </a:stretch>
         </p:blipFill>
         <p:spPr>
-          <a:xfrm>
-            <a:off x="1343472" y="5255001"/>
-            <a:ext cx="5400600" cy="728559"/>
+          <a:xfrm rot="16200000">
+            <a:off x="3101139" y="-2094178"/>
+            <a:ext cx="6888088" cy="10979486"/>
           </a:xfrm>
           <a:prstGeom prst="rect">
             <a:avLst/>
           </a:prstGeom>
         </p:spPr>
       </p:pic>
+      <p:sp>
+        <p:nvSpPr>
+          <p:cNvPr id="5" name="عنوان 1">
+            <a:extLst>
+              <a:ext uri="{FF2B5EF4-FFF2-40B4-BE49-F238E27FC236}">
+                <a16:creationId xmlns:a16="http://schemas.microsoft.com/office/drawing/2014/main" id="{307463B0-DF6F-4CF2-ABFB-E62F107F5374}"/>
+              </a:ext>
+            </a:extLst>
+          </p:cNvPr>
+          <p:cNvSpPr>
+            <a:spLocks noGrp="1"/>
+          </p:cNvSpPr>
+          <p:nvPr>
+            <p:ph type="title"/>
+          </p:nvPr>
+        </p:nvSpPr>
+        <p:spPr>
+          <a:xfrm>
+            <a:off x="263352" y="255349"/>
+            <a:ext cx="3301008" cy="1450757"/>
+          </a:xfrm>
+        </p:spPr>
+        <p:txBody>
+          <a:bodyPr>
+            <a:normAutofit/>
+          </a:bodyPr>
+          <a:lstStyle/>
+          <a:p>
+            <a:pPr algn="ctr"/>
+            <a:r>
+              <a:rPr lang="en-US" sz="3600" b="1" dirty="0">
+                <a:solidFill>
+                  <a:srgbClr val="FF0000"/>
+                </a:solidFill>
+                <a:effectLst>
+                  <a:outerShdw blurRad="38100" dist="38100" dir="2700000" algn="tl">
+                    <a:srgbClr val="000000">
+                      <a:alpha val="43137"/>
+                    </a:srgbClr>
+                  </a:outerShdw>
+                </a:effectLst>
+              </a:rPr>
+              <a:t>Project Overview</a:t>
+            </a:r>
+            <a:br>
+              <a:rPr lang="en-US" sz="3600" b="1" dirty="0">
+                <a:effectLst>
+                  <a:outerShdw blurRad="38100" dist="38100" dir="2700000" algn="tl">
+                    <a:srgbClr val="000000">
+                      <a:alpha val="43137"/>
+                    </a:srgbClr>
+                  </a:outerShdw>
+                </a:effectLst>
+              </a:rPr>
+            </a:br>
+            <a:endParaRPr lang="en-US" sz="3600" b="1" dirty="0">
+              <a:effectLst>
+                <a:outerShdw blurRad="38100" dist="38100" dir="2700000" algn="tl">
+                  <a:srgbClr val="000000">
+                    <a:alpha val="43137"/>
+                  </a:srgbClr>
+                </a:outerShdw>
+              </a:effectLst>
+            </a:endParaRPr>
+          </a:p>
+        </p:txBody>
+      </p:sp>
     </p:spTree>
     <p:extLst>
       <p:ext uri="{BB962C8B-B14F-4D97-AF65-F5344CB8AC3E}">
-        <p14:creationId xmlns:p14="http://schemas.microsoft.com/office/powerpoint/2010/main" val="3442606169"/>
+        <p14:creationId xmlns:p14="http://schemas.microsoft.com/office/powerpoint/2010/main" val="3711609882"/>
       </p:ext>
     </p:extLst>
   </p:cSld>
@@ -9858,9 +9467,126 @@
           <a:chExt cx="0" cy="0"/>
         </a:xfrm>
       </p:grpSpPr>
+      <p:sp>
+        <p:nvSpPr>
+          <p:cNvPr id="2" name="عنوان 1"/>
+          <p:cNvSpPr>
+            <a:spLocks noGrp="1"/>
+          </p:cNvSpPr>
+          <p:nvPr>
+            <p:ph type="title"/>
+          </p:nvPr>
+        </p:nvSpPr>
+        <p:spPr>
+          <a:xfrm>
+            <a:off x="2063552" y="260648"/>
+            <a:ext cx="8229600" cy="1143000"/>
+          </a:xfrm>
+        </p:spPr>
+        <p:txBody>
+          <a:bodyPr>
+            <a:normAutofit fontScale="90000"/>
+          </a:bodyPr>
+          <a:lstStyle/>
+          <a:p>
+            <a:pPr algn="l" rtl="0"/>
+            <a:br>
+              <a:rPr lang="en-US" b="1" dirty="0">
+                <a:solidFill>
+                  <a:srgbClr val="354154"/>
+                </a:solidFill>
+                <a:latin typeface="-apple-system"/>
+              </a:rPr>
+            </a:br>
+            <a:r>
+              <a:rPr lang="en-US" sz="3100" b="1" dirty="0">
+                <a:solidFill>
+                  <a:srgbClr val="FF0000"/>
+                </a:solidFill>
+                <a:latin typeface="-apple-system"/>
+              </a:rPr>
+              <a:t>3.Implementation Details</a:t>
+            </a:r>
+            <a:br>
+              <a:rPr lang="en-US" b="1" dirty="0">
+                <a:solidFill>
+                  <a:srgbClr val="354154"/>
+                </a:solidFill>
+                <a:latin typeface="-apple-system"/>
+              </a:rPr>
+            </a:br>
+            <a:endParaRPr lang="en-US" dirty="0"/>
+          </a:p>
+        </p:txBody>
+      </p:sp>
+      <p:sp>
+        <p:nvSpPr>
+          <p:cNvPr id="3" name="عنصر نائب للمحتوى 2"/>
+          <p:cNvSpPr>
+            <a:spLocks noGrp="1"/>
+          </p:cNvSpPr>
+          <p:nvPr>
+            <p:ph idx="1"/>
+          </p:nvPr>
+        </p:nvSpPr>
+        <p:spPr>
+          <a:xfrm>
+            <a:off x="839416" y="1268760"/>
+            <a:ext cx="10513168" cy="4713387"/>
+          </a:xfrm>
+        </p:spPr>
+        <p:txBody>
+          <a:bodyPr>
+            <a:normAutofit/>
+          </a:bodyPr>
+          <a:lstStyle/>
+          <a:p>
+            <a:pPr marL="0" indent="0">
+              <a:buNone/>
+            </a:pPr>
+            <a:r>
+              <a:rPr lang="en-US" sz="2800" dirty="0">
+                <a:solidFill>
+                  <a:srgbClr val="354154"/>
+                </a:solidFill>
+                <a:latin typeface="-apple-system"/>
+              </a:rPr>
+              <a:t>0.</a:t>
+            </a:r>
+            <a:r>
+              <a:rPr lang="en-US" sz="2800" dirty="0"/>
+              <a:t> Main</a:t>
+            </a:r>
+            <a:r>
+              <a:rPr lang="en-US" sz="2800" dirty="0">
+                <a:solidFill>
+                  <a:srgbClr val="354154"/>
+                </a:solidFill>
+                <a:latin typeface="-apple-system"/>
+              </a:rPr>
+              <a:t> Method:</a:t>
+            </a:r>
+          </a:p>
+          <a:p>
+            <a:pPr marL="0" indent="0" algn="l" rtl="0">
+              <a:buNone/>
+            </a:pPr>
+            <a:r>
+              <a:rPr lang="en-US" sz="2800" dirty="0"/>
+              <a:t>Start point of the project</a:t>
+            </a:r>
+          </a:p>
+        </p:txBody>
+      </p:sp>
       <p:pic>
         <p:nvPicPr>
-          <p:cNvPr id="2" name="صورة 1"/>
+          <p:cNvPr id="5" name="Picture 4">
+            <a:extLst>
+              <a:ext uri="{FF2B5EF4-FFF2-40B4-BE49-F238E27FC236}">
+                <a16:creationId xmlns:a16="http://schemas.microsoft.com/office/drawing/2014/main" id="{88AD420B-E6A7-4C02-8969-7E0701AA93BC}"/>
+              </a:ext>
+            </a:extLst>
+          </p:cNvPr>
           <p:cNvPicPr>
             <a:picLocks noChangeAspect="1"/>
           </p:cNvPicPr>
@@ -9880,38 +9606,8 @@
         </p:blipFill>
         <p:spPr>
           <a:xfrm>
-            <a:off x="-96688" y="522850"/>
-            <a:ext cx="7137439" cy="4922373"/>
-          </a:xfrm>
-          <a:prstGeom prst="rect">
-            <a:avLst/>
-          </a:prstGeom>
-        </p:spPr>
-      </p:pic>
-      <p:pic>
-        <p:nvPicPr>
-          <p:cNvPr id="3" name="صورة 2"/>
-          <p:cNvPicPr>
-            <a:picLocks noChangeAspect="1"/>
-          </p:cNvPicPr>
-          <p:nvPr/>
-        </p:nvPicPr>
-        <p:blipFill>
-          <a:blip r:embed="rId3">
-            <a:extLst>
-              <a:ext uri="{28A0092B-C50C-407E-A947-70E740481C1C}">
-                <a14:useLocalDpi xmlns:a14="http://schemas.microsoft.com/office/drawing/2010/main" val="0"/>
-              </a:ext>
-            </a:extLst>
-          </a:blip>
-          <a:stretch>
-            <a:fillRect/>
-          </a:stretch>
-        </p:blipFill>
-        <p:spPr>
-          <a:xfrm>
-            <a:off x="6816080" y="620688"/>
-            <a:ext cx="5635819" cy="5040560"/>
+            <a:off x="13387" y="2424800"/>
+            <a:ext cx="11590362" cy="4268234"/>
           </a:xfrm>
           <a:prstGeom prst="rect">
             <a:avLst/>
@@ -9921,7 +9617,7 @@
     </p:spTree>
     <p:extLst>
       <p:ext uri="{BB962C8B-B14F-4D97-AF65-F5344CB8AC3E}">
-        <p14:creationId xmlns:p14="http://schemas.microsoft.com/office/powerpoint/2010/main" val="563380089"/>
+        <p14:creationId xmlns:p14="http://schemas.microsoft.com/office/powerpoint/2010/main" val="3071587134"/>
       </p:ext>
     </p:extLst>
   </p:cSld>
